--- a/doc/12_データベース構造レビュー資料.pptx
+++ b/doc/12_データベース構造レビュー資料.pptx
@@ -5457,7 +5457,7 @@
                 <a:cs typeface="Meiryo"/>
                 <a:ea typeface="Meiryo"/>
               </a:rPr>
-              <a:t>この18枚も既存15枚と同じ規約(tenant_id + RLS + 複合外部キー + CHECK + updated_at トリガー)に載せてあります。先に作った理由と、そこで迷った判断は第4章(P26・P27)で扱います。</a:t>
+              <a:t>この18枚も既存16枚と同じ規約(tenant_id + RLS + 複合外部キー + CHECK + updated_at トリガー)に載せてあります。先に作った理由と、そこで迷った判断は第4章(P26・P27)で扱います。</a:t>
             </a:r>
           </a:p>
         </p:txBody>
@@ -18873,7 +18873,7 @@
                 <a:cs typeface="Meiryo"/>
                 <a:ea typeface="Meiryo"/>
               </a:rPr>
-              <a:t>問題① customers が37列に肥大化している</a:t>
+              <a:t>問題① customers が39列に肥大化している</a:t>
             </a:r>
             <a:r>
               <a:rPr sz="1250" b="0" i="0">
@@ -19088,7 +19088,7 @@
                 <a:cs typeface="Meiryo"/>
                 <a:ea typeface="Meiryo"/>
               </a:rPr>
-              <a:t>現状:1枚に8カテゴリが同居している</a:t>
+              <a:t>現状:1枚に9カテゴリが同居している</a:t>
             </a:r>
           </a:p>
         </p:txBody>
@@ -19319,7 +19319,7 @@
         </p:nvSpPr>
         <p:spPr>
           <a:xfrm>
-            <a:off x="457200" y="2139696"/>
+            <a:off x="457200" y="2103120"/>
             <a:ext cx="5394960" cy="347472"/>
           </a:xfrm>
           <a:prstGeom prst="roundRect">
@@ -19367,7 +19367,7 @@
         </p:nvSpPr>
         <p:spPr>
           <a:xfrm>
-            <a:off x="457200" y="2139696"/>
+            <a:off x="457200" y="2103120"/>
             <a:ext cx="54864" cy="347472"/>
           </a:xfrm>
           <a:prstGeom prst="rect">
@@ -19411,7 +19411,7 @@
         </p:nvSpPr>
         <p:spPr>
           <a:xfrm>
-            <a:off x="603504" y="2176272"/>
+            <a:off x="603504" y="2139696"/>
             <a:ext cx="1920240" cy="274320"/>
           </a:xfrm>
           <a:prstGeom prst="rect">
@@ -19453,7 +19453,7 @@
         </p:nvSpPr>
         <p:spPr>
           <a:xfrm>
-            <a:off x="2542032" y="2176272"/>
+            <a:off x="2542032" y="2139696"/>
             <a:ext cx="502920" cy="274320"/>
           </a:xfrm>
           <a:prstGeom prst="rect">
@@ -19495,7 +19495,7 @@
         </p:nvSpPr>
         <p:spPr>
           <a:xfrm>
-            <a:off x="3154680" y="2203703"/>
+            <a:off x="3154680" y="2167127"/>
             <a:ext cx="2651760" cy="274320"/>
           </a:xfrm>
           <a:prstGeom prst="rect">
@@ -19537,7 +19537,7 @@
         </p:nvSpPr>
         <p:spPr>
           <a:xfrm>
-            <a:off x="457200" y="2542032"/>
+            <a:off x="457200" y="2468879"/>
             <a:ext cx="5394960" cy="347472"/>
           </a:xfrm>
           <a:prstGeom prst="roundRect">
@@ -19585,7 +19585,7 @@
         </p:nvSpPr>
         <p:spPr>
           <a:xfrm>
-            <a:off x="457200" y="2542032"/>
+            <a:off x="457200" y="2468879"/>
             <a:ext cx="54864" cy="347472"/>
           </a:xfrm>
           <a:prstGeom prst="rect">
@@ -19629,7 +19629,7 @@
         </p:nvSpPr>
         <p:spPr>
           <a:xfrm>
-            <a:off x="603504" y="2578608"/>
+            <a:off x="603504" y="2505456"/>
             <a:ext cx="1920240" cy="274320"/>
           </a:xfrm>
           <a:prstGeom prst="rect">
@@ -19671,7 +19671,7 @@
         </p:nvSpPr>
         <p:spPr>
           <a:xfrm>
-            <a:off x="2542032" y="2578608"/>
+            <a:off x="2542032" y="2505456"/>
             <a:ext cx="502920" cy="274320"/>
           </a:xfrm>
           <a:prstGeom prst="rect">
@@ -19713,7 +19713,7 @@
         </p:nvSpPr>
         <p:spPr>
           <a:xfrm>
-            <a:off x="3154680" y="2606039"/>
+            <a:off x="3154680" y="2532887"/>
             <a:ext cx="2651760" cy="274320"/>
           </a:xfrm>
           <a:prstGeom prst="rect">
@@ -19755,7 +19755,7 @@
         </p:nvSpPr>
         <p:spPr>
           <a:xfrm>
-            <a:off x="457200" y="2944368"/>
+            <a:off x="457200" y="2834639"/>
             <a:ext cx="5394960" cy="347472"/>
           </a:xfrm>
           <a:prstGeom prst="roundRect">
@@ -19803,7 +19803,7 @@
         </p:nvSpPr>
         <p:spPr>
           <a:xfrm>
-            <a:off x="457200" y="2944368"/>
+            <a:off x="457200" y="2834639"/>
             <a:ext cx="54864" cy="347472"/>
           </a:xfrm>
           <a:prstGeom prst="rect">
@@ -19847,7 +19847,7 @@
         </p:nvSpPr>
         <p:spPr>
           <a:xfrm>
-            <a:off x="603504" y="2980944"/>
+            <a:off x="603504" y="2871215"/>
             <a:ext cx="1920240" cy="274320"/>
           </a:xfrm>
           <a:prstGeom prst="rect">
@@ -19889,7 +19889,7 @@
         </p:nvSpPr>
         <p:spPr>
           <a:xfrm>
-            <a:off x="2542032" y="2980944"/>
+            <a:off x="2542032" y="2871215"/>
             <a:ext cx="502920" cy="274320"/>
           </a:xfrm>
           <a:prstGeom prst="rect">
@@ -19931,7 +19931,7 @@
         </p:nvSpPr>
         <p:spPr>
           <a:xfrm>
-            <a:off x="3154680" y="3008375"/>
+            <a:off x="3154680" y="2898647"/>
             <a:ext cx="2651760" cy="274320"/>
           </a:xfrm>
           <a:prstGeom prst="rect">
@@ -19973,7 +19973,7 @@
         </p:nvSpPr>
         <p:spPr>
           <a:xfrm>
-            <a:off x="457200" y="3346703"/>
+            <a:off x="457200" y="3200399"/>
             <a:ext cx="5394960" cy="347472"/>
           </a:xfrm>
           <a:prstGeom prst="roundRect">
@@ -20021,7 +20021,7 @@
         </p:nvSpPr>
         <p:spPr>
           <a:xfrm>
-            <a:off x="457200" y="3346703"/>
+            <a:off x="457200" y="3200399"/>
             <a:ext cx="54864" cy="347472"/>
           </a:xfrm>
           <a:prstGeom prst="rect">
@@ -20065,7 +20065,7 @@
         </p:nvSpPr>
         <p:spPr>
           <a:xfrm>
-            <a:off x="603504" y="3383279"/>
+            <a:off x="603504" y="3236975"/>
             <a:ext cx="1920240" cy="274320"/>
           </a:xfrm>
           <a:prstGeom prst="rect">
@@ -20107,7 +20107,7 @@
         </p:nvSpPr>
         <p:spPr>
           <a:xfrm>
-            <a:off x="2542032" y="3383279"/>
+            <a:off x="2542032" y="3236975"/>
             <a:ext cx="502920" cy="274320"/>
           </a:xfrm>
           <a:prstGeom prst="rect">
@@ -20149,7 +20149,7 @@
         </p:nvSpPr>
         <p:spPr>
           <a:xfrm>
-            <a:off x="3154680" y="3410711"/>
+            <a:off x="3154680" y="3264407"/>
             <a:ext cx="2651760" cy="274320"/>
           </a:xfrm>
           <a:prstGeom prst="rect">
@@ -20191,7 +20191,7 @@
         </p:nvSpPr>
         <p:spPr>
           <a:xfrm>
-            <a:off x="457200" y="3749039"/>
+            <a:off x="457200" y="3566159"/>
             <a:ext cx="5394960" cy="347472"/>
           </a:xfrm>
           <a:prstGeom prst="roundRect">
@@ -20239,7 +20239,7 @@
         </p:nvSpPr>
         <p:spPr>
           <a:xfrm>
-            <a:off x="457200" y="3749039"/>
+            <a:off x="457200" y="3566159"/>
             <a:ext cx="54864" cy="347472"/>
           </a:xfrm>
           <a:prstGeom prst="rect">
@@ -20283,7 +20283,7 @@
         </p:nvSpPr>
         <p:spPr>
           <a:xfrm>
-            <a:off x="603504" y="3785615"/>
+            <a:off x="603504" y="3602735"/>
             <a:ext cx="1920240" cy="274320"/>
           </a:xfrm>
           <a:prstGeom prst="rect">
@@ -20325,7 +20325,7 @@
         </p:nvSpPr>
         <p:spPr>
           <a:xfrm>
-            <a:off x="2542032" y="3785615"/>
+            <a:off x="2542032" y="3602735"/>
             <a:ext cx="502920" cy="274320"/>
           </a:xfrm>
           <a:prstGeom prst="rect">
@@ -20367,7 +20367,7 @@
         </p:nvSpPr>
         <p:spPr>
           <a:xfrm>
-            <a:off x="3154680" y="3813048"/>
+            <a:off x="3154680" y="3630167"/>
             <a:ext cx="2651760" cy="274320"/>
           </a:xfrm>
           <a:prstGeom prst="rect">
@@ -20409,7 +20409,7 @@
         </p:nvSpPr>
         <p:spPr>
           <a:xfrm>
-            <a:off x="457200" y="4151376"/>
+            <a:off x="457200" y="3931920"/>
             <a:ext cx="5394960" cy="347472"/>
           </a:xfrm>
           <a:prstGeom prst="roundRect">
@@ -20457,7 +20457,7 @@
         </p:nvSpPr>
         <p:spPr>
           <a:xfrm>
-            <a:off x="457200" y="4151376"/>
+            <a:off x="457200" y="3931920"/>
             <a:ext cx="54864" cy="347472"/>
           </a:xfrm>
           <a:prstGeom prst="rect">
@@ -20501,7 +20501,7 @@
         </p:nvSpPr>
         <p:spPr>
           <a:xfrm>
-            <a:off x="603504" y="4187952"/>
+            <a:off x="603504" y="3968496"/>
             <a:ext cx="1920240" cy="274320"/>
           </a:xfrm>
           <a:prstGeom prst="rect">
@@ -20543,7 +20543,7 @@
         </p:nvSpPr>
         <p:spPr>
           <a:xfrm>
-            <a:off x="2542032" y="4187952"/>
+            <a:off x="2542032" y="3968496"/>
             <a:ext cx="502920" cy="274320"/>
           </a:xfrm>
           <a:prstGeom prst="rect">
@@ -20585,7 +20585,7 @@
         </p:nvSpPr>
         <p:spPr>
           <a:xfrm>
-            <a:off x="3154680" y="4215384"/>
+            <a:off x="3154680" y="3995928"/>
             <a:ext cx="2651760" cy="274320"/>
           </a:xfrm>
           <a:prstGeom prst="rect">
@@ -20627,7 +20627,7 @@
         </p:nvSpPr>
         <p:spPr>
           <a:xfrm>
-            <a:off x="457200" y="4553712"/>
+            <a:off x="457200" y="4297680"/>
             <a:ext cx="5394960" cy="347472"/>
           </a:xfrm>
           <a:prstGeom prst="roundRect">
@@ -20675,7 +20675,225 @@
         </p:nvSpPr>
         <p:spPr>
           <a:xfrm>
-            <a:off x="457200" y="4553712"/>
+            <a:off x="457200" y="4297680"/>
+            <a:ext cx="54864" cy="347472"/>
+          </a:xfrm>
+          <a:prstGeom prst="rect">
+            <a:avLst/>
+          </a:prstGeom>
+          <a:solidFill>
+            <a:srgbClr val="047857"/>
+          </a:solidFill>
+          <a:ln>
+            <a:noFill/>
+          </a:ln>
+          <a:effectLst/>
+        </p:spPr>
+        <p:style>
+          <a:lnRef idx="1">
+            <a:schemeClr val="accent1"/>
+          </a:lnRef>
+          <a:fillRef idx="3">
+            <a:schemeClr val="accent1"/>
+          </a:fillRef>
+          <a:effectRef idx="2">
+            <a:schemeClr val="accent1"/>
+          </a:effectRef>
+          <a:fontRef idx="minor">
+            <a:schemeClr val="lt1"/>
+          </a:fontRef>
+        </p:style>
+        <p:txBody>
+          <a:bodyPr rtlCol="0" anchor="ctr" wrap="square"/>
+          <a:lstStyle/>
+          <a:p>
+            <a:pPr algn="ctr"/>
+          </a:p>
+        </p:txBody>
+      </p:sp>
+      <p:sp>
+        <p:nvSpPr>
+          <p:cNvPr id="46" name="TextBox 45"/>
+          <p:cNvSpPr txBox="1"/>
+          <p:nvPr/>
+        </p:nvSpPr>
+        <p:spPr>
+          <a:xfrm>
+            <a:off x="603504" y="4334256"/>
+            <a:ext cx="1920240" cy="274320"/>
+          </a:xfrm>
+          <a:prstGeom prst="rect">
+            <a:avLst/>
+          </a:prstGeom>
+          <a:noFill/>
+        </p:spPr>
+        <p:txBody>
+          <a:bodyPr wrap="square" lIns="0" rIns="0" tIns="0" bIns="0" anchor="t">
+            <a:spAutoFit/>
+          </a:bodyPr>
+          <a:lstStyle/>
+          <a:p>
+            <a:pPr algn="l">
+              <a:lnSpc>
+                <a:spcPct val="125000"/>
+              </a:lnSpc>
+              <a:buNone/>
+            </a:pPr>
+            <a:r>
+              <a:rPr sz="1050" b="1" i="0">
+                <a:solidFill>
+                  <a:srgbClr val="047857"/>
+                </a:solidFill>
+                <a:latin typeface="Meiryo"/>
+                <a:cs typeface="Meiryo"/>
+                <a:ea typeface="Meiryo"/>
+              </a:rPr>
+              <a:t>生年月日</a:t>
+            </a:r>
+          </a:p>
+        </p:txBody>
+      </p:sp>
+      <p:sp>
+        <p:nvSpPr>
+          <p:cNvPr id="47" name="TextBox 46"/>
+          <p:cNvSpPr txBox="1"/>
+          <p:nvPr/>
+        </p:nvSpPr>
+        <p:spPr>
+          <a:xfrm>
+            <a:off x="2542032" y="4334256"/>
+            <a:ext cx="502920" cy="274320"/>
+          </a:xfrm>
+          <a:prstGeom prst="rect">
+            <a:avLst/>
+          </a:prstGeom>
+          <a:noFill/>
+        </p:spPr>
+        <p:txBody>
+          <a:bodyPr wrap="square" lIns="0" rIns="0" tIns="0" bIns="0" anchor="t">
+            <a:spAutoFit/>
+          </a:bodyPr>
+          <a:lstStyle/>
+          <a:p>
+            <a:pPr algn="r">
+              <a:lnSpc>
+                <a:spcPct val="125000"/>
+              </a:lnSpc>
+              <a:buNone/>
+            </a:pPr>
+            <a:r>
+              <a:rPr sz="1050" b="1" i="0">
+                <a:solidFill>
+                  <a:srgbClr val="14223A"/>
+                </a:solidFill>
+                <a:latin typeface="Meiryo"/>
+                <a:cs typeface="Meiryo"/>
+                <a:ea typeface="Meiryo"/>
+              </a:rPr>
+              <a:t>2列</a:t>
+            </a:r>
+          </a:p>
+        </p:txBody>
+      </p:sp>
+      <p:sp>
+        <p:nvSpPr>
+          <p:cNvPr id="48" name="TextBox 47"/>
+          <p:cNvSpPr txBox="1"/>
+          <p:nvPr/>
+        </p:nvSpPr>
+        <p:spPr>
+          <a:xfrm>
+            <a:off x="3154680" y="4361688"/>
+            <a:ext cx="2651760" cy="274320"/>
+          </a:xfrm>
+          <a:prstGeom prst="rect">
+            <a:avLst/>
+          </a:prstGeom>
+          <a:noFill/>
+        </p:spPr>
+        <p:txBody>
+          <a:bodyPr wrap="square" lIns="0" rIns="0" tIns="0" bIns="0" anchor="t">
+            <a:spAutoFit/>
+          </a:bodyPr>
+          <a:lstStyle/>
+          <a:p>
+            <a:pPr algn="l">
+              <a:lnSpc>
+                <a:spcPct val="125000"/>
+              </a:lnSpc>
+              <a:buNone/>
+            </a:pPr>
+            <a:r>
+              <a:rPr sz="900" b="0" i="0">
+                <a:solidFill>
+                  <a:srgbClr val="64748B"/>
+                </a:solidFill>
+                <a:latin typeface="Meiryo"/>
+                <a:cs typeface="Meiryo"/>
+                <a:ea typeface="Meiryo"/>
+              </a:rPr>
+              <a:t>日付型 / 元表記(誕生月クーポン用・手入力)</a:t>
+            </a:r>
+          </a:p>
+        </p:txBody>
+      </p:sp>
+      <p:sp>
+        <p:nvSpPr>
+          <p:cNvPr id="49" name="Rounded Rectangle 48"/>
+          <p:cNvSpPr/>
+          <p:nvPr/>
+        </p:nvSpPr>
+        <p:spPr>
+          <a:xfrm>
+            <a:off x="457200" y="4663440"/>
+            <a:ext cx="5394960" cy="347472"/>
+          </a:xfrm>
+          <a:prstGeom prst="roundRect">
+            <a:avLst>
+              <a:gd name="adj" fmla="val 12000"/>
+            </a:avLst>
+          </a:prstGeom>
+          <a:solidFill>
+            <a:srgbClr val="FFFFFF"/>
+          </a:solidFill>
+          <a:ln w="12700">
+            <a:solidFill>
+              <a:srgbClr val="CBD5E1"/>
+            </a:solidFill>
+          </a:ln>
+          <a:effectLst/>
+        </p:spPr>
+        <p:style>
+          <a:lnRef idx="1">
+            <a:schemeClr val="accent1"/>
+          </a:lnRef>
+          <a:fillRef idx="3">
+            <a:schemeClr val="accent1"/>
+          </a:fillRef>
+          <a:effectRef idx="2">
+            <a:schemeClr val="accent1"/>
+          </a:effectRef>
+          <a:fontRef idx="minor">
+            <a:schemeClr val="lt1"/>
+          </a:fontRef>
+        </p:style>
+        <p:txBody>
+          <a:bodyPr rtlCol="0" anchor="ctr" wrap="square"/>
+          <a:lstStyle/>
+          <a:p>
+            <a:pPr algn="ctr"/>
+          </a:p>
+        </p:txBody>
+      </p:sp>
+      <p:sp>
+        <p:nvSpPr>
+          <p:cNvPr id="50" name="Rectangle 49"/>
+          <p:cNvSpPr/>
+          <p:nvPr/>
+        </p:nvSpPr>
+        <p:spPr>
+          <a:xfrm>
+            <a:off x="457200" y="4663440"/>
             <a:ext cx="54864" cy="347472"/>
           </a:xfrm>
           <a:prstGeom prst="rect">
@@ -20713,13 +20931,13 @@
       </p:sp>
       <p:sp>
         <p:nvSpPr>
-          <p:cNvPr id="46" name="TextBox 45"/>
+          <p:cNvPr id="51" name="TextBox 50"/>
           <p:cNvSpPr txBox="1"/>
           <p:nvPr/>
         </p:nvSpPr>
         <p:spPr>
           <a:xfrm>
-            <a:off x="603504" y="4590288"/>
+            <a:off x="603504" y="4700016"/>
             <a:ext cx="1920240" cy="274320"/>
           </a:xfrm>
           <a:prstGeom prst="rect">
@@ -20755,13 +20973,13 @@
       </p:sp>
       <p:sp>
         <p:nvSpPr>
-          <p:cNvPr id="47" name="TextBox 46"/>
+          <p:cNvPr id="52" name="TextBox 51"/>
           <p:cNvSpPr txBox="1"/>
           <p:nvPr/>
         </p:nvSpPr>
         <p:spPr>
           <a:xfrm>
-            <a:off x="2542032" y="4590288"/>
+            <a:off x="2542032" y="4700016"/>
             <a:ext cx="502920" cy="274320"/>
           </a:xfrm>
           <a:prstGeom prst="rect">
@@ -20797,13 +21015,13 @@
       </p:sp>
       <p:sp>
         <p:nvSpPr>
-          <p:cNvPr id="48" name="TextBox 47"/>
+          <p:cNvPr id="53" name="TextBox 52"/>
           <p:cNvSpPr txBox="1"/>
           <p:nvPr/>
         </p:nvSpPr>
         <p:spPr>
           <a:xfrm>
-            <a:off x="3154680" y="4617720"/>
+            <a:off x="3154680" y="4727448"/>
             <a:ext cx="2651760" cy="274320"/>
           </a:xfrm>
           <a:prstGeom prst="rect">
@@ -20839,13 +21057,13 @@
       </p:sp>
       <p:sp>
         <p:nvSpPr>
-          <p:cNvPr id="49" name="Rounded Rectangle 48"/>
+          <p:cNvPr id="54" name="Rounded Rectangle 53"/>
           <p:cNvSpPr/>
           <p:nvPr/>
         </p:nvSpPr>
         <p:spPr>
           <a:xfrm>
-            <a:off x="457200" y="4956048"/>
+            <a:off x="457200" y="5029200"/>
             <a:ext cx="5394960" cy="329184"/>
           </a:xfrm>
           <a:prstGeom prst="roundRect">
@@ -20894,14 +21112,14 @@
                 <a:cs typeface="Meiryo"/>
                 <a:ea typeface="Meiryo"/>
               </a:rPr>
-              <a:t>合計 37列(1テーブル)</a:t>
-            </a:r>
-          </a:p>
-        </p:txBody>
-      </p:sp>
-      <p:sp>
-        <p:nvSpPr>
-          <p:cNvPr id="50" name="TextBox 49"/>
+              <a:t>合計 39列(1テーブル)</a:t>
+            </a:r>
+          </a:p>
+        </p:txBody>
+      </p:sp>
+      <p:sp>
+        <p:nvSpPr>
+          <p:cNvPr id="55" name="TextBox 54"/>
           <p:cNvSpPr txBox="1"/>
           <p:nvPr/>
         </p:nvSpPr>
@@ -20943,7 +21161,7 @@
       </p:sp>
       <p:sp>
         <p:nvSpPr>
-          <p:cNvPr id="51" name="Rounded Rectangle 50"/>
+          <p:cNvPr id="56" name="Rounded Rectangle 55"/>
           <p:cNvSpPr/>
           <p:nvPr/>
         </p:nvSpPr>
@@ -20991,7 +21209,7 @@
       </p:sp>
       <p:sp>
         <p:nvSpPr>
-          <p:cNvPr id="52" name="TextBox 51"/>
+          <p:cNvPr id="57" name="TextBox 56"/>
           <p:cNvSpPr txBox="1"/>
           <p:nvPr/>
         </p:nvSpPr>
@@ -21033,7 +21251,7 @@
       </p:sp>
       <p:sp>
         <p:nvSpPr>
-          <p:cNvPr id="53" name="TextBox 52"/>
+          <p:cNvPr id="58" name="TextBox 57"/>
           <p:cNvSpPr txBox="1"/>
           <p:nvPr/>
         </p:nvSpPr>
@@ -21075,7 +21293,7 @@
       </p:sp>
       <p:sp>
         <p:nvSpPr>
-          <p:cNvPr id="54" name="Rounded Rectangle 53"/>
+          <p:cNvPr id="59" name="Rounded Rectangle 58"/>
           <p:cNvSpPr/>
           <p:nvPr/>
         </p:nvSpPr>
@@ -21123,7 +21341,7 @@
       </p:sp>
       <p:sp>
         <p:nvSpPr>
-          <p:cNvPr id="55" name="TextBox 54"/>
+          <p:cNvPr id="60" name="TextBox 59"/>
           <p:cNvSpPr txBox="1"/>
           <p:nvPr/>
         </p:nvSpPr>
@@ -21165,7 +21383,7 @@
       </p:sp>
       <p:sp>
         <p:nvSpPr>
-          <p:cNvPr id="56" name="TextBox 55"/>
+          <p:cNvPr id="61" name="TextBox 60"/>
           <p:cNvSpPr txBox="1"/>
           <p:nvPr/>
         </p:nvSpPr>
@@ -21207,7 +21425,7 @@
       </p:sp>
       <p:sp>
         <p:nvSpPr>
-          <p:cNvPr id="57" name="Rounded Rectangle 56"/>
+          <p:cNvPr id="62" name="Rounded Rectangle 61"/>
           <p:cNvSpPr/>
           <p:nvPr/>
         </p:nvSpPr>
@@ -21255,7 +21473,7 @@
       </p:sp>
       <p:sp>
         <p:nvSpPr>
-          <p:cNvPr id="58" name="TextBox 57"/>
+          <p:cNvPr id="63" name="TextBox 62"/>
           <p:cNvSpPr txBox="1"/>
           <p:nvPr/>
         </p:nvSpPr>
@@ -21297,7 +21515,7 @@
       </p:sp>
       <p:sp>
         <p:nvSpPr>
-          <p:cNvPr id="59" name="TextBox 58"/>
+          <p:cNvPr id="64" name="TextBox 63"/>
           <p:cNvSpPr txBox="1"/>
           <p:nvPr/>
         </p:nvSpPr>
@@ -21339,7 +21557,7 @@
       </p:sp>
       <p:sp>
         <p:nvSpPr>
-          <p:cNvPr id="60" name="Rounded Rectangle 59"/>
+          <p:cNvPr id="65" name="Rounded Rectangle 64"/>
           <p:cNvSpPr/>
           <p:nvPr/>
         </p:nvSpPr>
@@ -21387,7 +21605,7 @@
       </p:sp>
       <p:sp>
         <p:nvSpPr>
-          <p:cNvPr id="61" name="TextBox 60"/>
+          <p:cNvPr id="66" name="TextBox 65"/>
           <p:cNvSpPr txBox="1"/>
           <p:nvPr/>
         </p:nvSpPr>
@@ -21429,7 +21647,7 @@
       </p:sp>
       <p:sp>
         <p:nvSpPr>
-          <p:cNvPr id="62" name="TextBox 61"/>
+          <p:cNvPr id="67" name="TextBox 66"/>
           <p:cNvSpPr txBox="1"/>
           <p:nvPr/>
         </p:nvSpPr>
@@ -21471,7 +21689,7 @@
       </p:sp>
       <p:sp>
         <p:nvSpPr>
-          <p:cNvPr id="63" name="Rounded Rectangle 62"/>
+          <p:cNvPr id="68" name="Rounded Rectangle 67"/>
           <p:cNvSpPr/>
           <p:nvPr/>
         </p:nvSpPr>
@@ -21519,7 +21737,7 @@
       </p:sp>
       <p:sp>
         <p:nvSpPr>
-          <p:cNvPr id="64" name="Rectangle 63"/>
+          <p:cNvPr id="69" name="Rectangle 68"/>
           <p:cNvSpPr/>
           <p:nvPr/>
         </p:nvSpPr>
@@ -21563,7 +21781,7 @@
       </p:sp>
       <p:sp>
         <p:nvSpPr>
-          <p:cNvPr id="65" name="TextBox 64"/>
+          <p:cNvPr id="70" name="TextBox 69"/>
           <p:cNvSpPr txBox="1"/>
           <p:nvPr/>
         </p:nvSpPr>
@@ -21605,7 +21823,7 @@
       </p:sp>
       <p:sp>
         <p:nvSpPr>
-          <p:cNvPr id="66" name="TextBox 65"/>
+          <p:cNvPr id="71" name="TextBox 70"/>
           <p:cNvSpPr txBox="1"/>
           <p:nvPr/>
         </p:nvSpPr>
@@ -21706,7 +21924,7 @@
       </p:sp>
       <p:sp>
         <p:nvSpPr>
-          <p:cNvPr id="67" name="Rounded Rectangle 66"/>
+          <p:cNvPr id="72" name="Rounded Rectangle 71"/>
           <p:cNvSpPr/>
           <p:nvPr/>
         </p:nvSpPr>
@@ -21752,7 +21970,7 @@
       </p:sp>
       <p:sp>
         <p:nvSpPr>
-          <p:cNvPr id="68" name="Rectangle 67"/>
+          <p:cNvPr id="73" name="Rectangle 72"/>
           <p:cNvSpPr/>
           <p:nvPr/>
         </p:nvSpPr>
@@ -21796,7 +22014,7 @@
       </p:sp>
       <p:sp>
         <p:nvSpPr>
-          <p:cNvPr id="69" name="TextBox 68"/>
+          <p:cNvPr id="74" name="TextBox 73"/>
           <p:cNvSpPr txBox="1"/>
           <p:nvPr/>
         </p:nvSpPr>
@@ -21838,7 +22056,7 @@
       </p:sp>
       <p:sp>
         <p:nvSpPr>
-          <p:cNvPr id="70" name="TextBox 69"/>
+          <p:cNvPr id="75" name="TextBox 74"/>
           <p:cNvSpPr txBox="1"/>
           <p:nvPr/>
         </p:nvSpPr>
@@ -21873,7 +22091,7 @@
                 <a:cs typeface="Meiryo"/>
                 <a:ea typeface="Meiryo"/>
               </a:rPr>
-              <a:t>「37列は多すぎるので分けるべき」か、「顧客マスタなら37列は普通で分けるほうが害」か。判断の基準(何列を超えたら、どういう単位で分けるか)をご教示いただきたいです。運用前なので、分けるなら今が最も安いタイミングです。</a:t>
+              <a:t>「39列は多すぎるので分けるべき」か、「顧客マスタなら39列は普通で分けるほうが害」か。判断の基準(何列を超えたら、どういう単位で分けるか)をご教示いただきたいです。運用前なので、分けるなら今が最も安いタイミングです。</a:t>
             </a:r>
           </a:p>
         </p:txBody>
@@ -23622,7 +23840,7 @@
                 <a:cs typeface="Meiryo"/>
                 <a:ea typeface="Meiryo"/>
               </a:rPr>
-              <a:t>customers 37列の肥大化ほか
+              <a:t>customers 39列の肥大化ほか
 6件を自己申告</a:t>
             </a:r>
           </a:p>
@@ -33889,7 +34107,7 @@
                 <a:cs typeface="Meiryo"/>
                 <a:ea typeface="Meiryo"/>
               </a:rPr>
-              <a:t>既存15枚と同じ規約に載せてある</a:t>
+              <a:t>既存16枚と同じ規約に載せてある</a:t>
             </a:r>
           </a:p>
         </p:txBody>
@@ -35840,7 +36058,7 @@
                           <a:cs typeface="Meiryo"/>
                           <a:ea typeface="Meiryo"/>
                         </a:rPr>
-                        <a:t>customers 37列を分けるべきか</a:t>
+                        <a:t>customers 39列を分けるべきか</a:t>
                       </a:r>
                     </a:p>
                   </a:txBody>
@@ -47263,7 +47481,7 @@
                 <a:cs typeface="Meiryo"/>
                 <a:ea typeface="Meiryo"/>
               </a:rPr>
-              <a:t>テーブル一覧① — 稼働中の15枚</a:t>
+              <a:t>テーブル一覧① — 稼働中の16枚</a:t>
             </a:r>
             <a:r>
               <a:rPr sz="1250" b="0" i="0">
@@ -47409,7 +47627,7 @@
         </p:nvGraphicFramePr>
         <p:xfrm>
           <a:off x="457200" y="1143000"/>
-          <a:ext cx="11277293" cy="4279392"/>
+          <a:ext cx="11277293" cy="4251960"/>
         </p:xfrm>
         <a:graphic>
           <a:graphicData uri="http://schemas.openxmlformats.org/drawingml/2006/table">
@@ -47545,7 +47763,7 @@
                   </a:tcPr>
                 </a:tc>
               </a:tr>
-              <a:tr h="265176">
+              <a:tr h="246888">
                 <a:tc>
                   <a:txBody>
                     <a:bodyPr wrap="square"/>
@@ -47667,7 +47885,7 @@
                   </a:tcPr>
                 </a:tc>
               </a:tr>
-              <a:tr h="265176">
+              <a:tr h="246888">
                 <a:tc>
                   <a:txBody>
                     <a:bodyPr wrap="square"/>
@@ -47789,7 +48007,7 @@
                   </a:tcPr>
                 </a:tc>
               </a:tr>
-              <a:tr h="265176">
+              <a:tr h="246888">
                 <a:tc>
                   <a:txBody>
                     <a:bodyPr wrap="square"/>
@@ -47911,7 +48129,7 @@
                   </a:tcPr>
                 </a:tc>
               </a:tr>
-              <a:tr h="265176">
+              <a:tr h="246888">
                 <a:tc>
                   <a:txBody>
                     <a:bodyPr wrap="square"/>
@@ -48033,7 +48251,7 @@
                   </a:tcPr>
                 </a:tc>
               </a:tr>
-              <a:tr h="265176">
+              <a:tr h="246888">
                 <a:tc>
                   <a:txBody>
                     <a:bodyPr wrap="square"/>
@@ -48155,7 +48373,7 @@
                   </a:tcPr>
                 </a:tc>
               </a:tr>
-              <a:tr h="265176">
+              <a:tr h="246888">
                 <a:tc>
                   <a:txBody>
                     <a:bodyPr wrap="square"/>
@@ -48277,7 +48495,7 @@
                   </a:tcPr>
                 </a:tc>
               </a:tr>
-              <a:tr h="265176">
+              <a:tr h="246888">
                 <a:tc>
                   <a:txBody>
                     <a:bodyPr wrap="square"/>
@@ -48399,7 +48617,7 @@
                   </a:tcPr>
                 </a:tc>
               </a:tr>
-              <a:tr h="265176">
+              <a:tr h="246888">
                 <a:tc>
                   <a:txBody>
                     <a:bodyPr wrap="square"/>
@@ -48450,7 +48668,7 @@
                           <a:cs typeface="Meiryo"/>
                           <a:ea typeface="Meiryo"/>
                         </a:rPr>
-                        <a:t>顧客(利用世帯の代表者)。37列</a:t>
+                        <a:t>顧客(利用世帯の代表者)。39列</a:t>
                       </a:r>
                     </a:p>
                   </a:txBody>
@@ -48521,7 +48739,7 @@
                   </a:tcPr>
                 </a:tc>
               </a:tr>
-              <a:tr h="265176">
+              <a:tr h="246888">
                 <a:tc>
                   <a:txBody>
                     <a:bodyPr wrap="square"/>
@@ -48643,7 +48861,7 @@
                   </a:tcPr>
                 </a:tc>
               </a:tr>
-              <a:tr h="265176">
+              <a:tr h="246888">
                 <a:tc>
                   <a:txBody>
                     <a:bodyPr wrap="square"/>
@@ -48765,7 +48983,7 @@
                   </a:tcPr>
                 </a:tc>
               </a:tr>
-              <a:tr h="265176">
+              <a:tr h="246888">
                 <a:tc>
                   <a:txBody>
                     <a:bodyPr wrap="square"/>
@@ -48887,7 +49105,7 @@
                   </a:tcPr>
                 </a:tc>
               </a:tr>
-              <a:tr h="265176">
+              <a:tr h="246888">
                 <a:tc>
                   <a:txBody>
                     <a:bodyPr wrap="square"/>
@@ -49009,7 +49227,7 @@
                   </a:tcPr>
                 </a:tc>
               </a:tr>
-              <a:tr h="265176">
+              <a:tr h="246888">
                 <a:tc>
                   <a:txBody>
                     <a:bodyPr wrap="square"/>
@@ -49131,7 +49349,7 @@
                   </a:tcPr>
                 </a:tc>
               </a:tr>
-              <a:tr h="265176">
+              <a:tr h="246888">
                 <a:tc>
                   <a:txBody>
                     <a:bodyPr wrap="square"/>
@@ -49253,7 +49471,7 @@
                   </a:tcPr>
                 </a:tc>
               </a:tr>
-              <a:tr h="265176">
+              <a:tr h="246888">
                 <a:tc>
                   <a:txBody>
                     <a:bodyPr wrap="square"/>
@@ -49274,7 +49492,7 @@
                           <a:cs typeface="Meiryo"/>
                           <a:ea typeface="Meiryo"/>
                         </a:rPr>
-                        <a:t>coupon_redemptions</a:t>
+                        <a:t>customer_coupons</a:t>
                       </a:r>
                     </a:p>
                   </a:txBody>
@@ -49304,7 +49522,7 @@
                           <a:cs typeface="Meiryo"/>
                           <a:ea typeface="Meiryo"/>
                         </a:rPr>
-                        <a:t>日報1件への割引クーポン適用記録</a:t>
+                        <a:t>顧客へのクーポン配布</a:t>
                       </a:r>
                     </a:p>
                   </a:txBody>
@@ -49334,7 +49552,7 @@
                           <a:cs typeface="Meiryo"/>
                           <a:ea typeface="Meiryo"/>
                         </a:rPr>
-                        <a:t>UNIQUE(tenant_id, daily_report_id, coupon_id)</a:t>
+                        <a:t>UNIQUE(tenant_id, customer_id, coupon_id)</a:t>
                       </a:r>
                     </a:p>
                   </a:txBody>
@@ -49375,6 +49593,128 @@
                   </a:tcPr>
                 </a:tc>
               </a:tr>
+              <a:tr h="246888">
+                <a:tc>
+                  <a:txBody>
+                    <a:bodyPr wrap="square"/>
+                    <a:lstStyle/>
+                    <a:p>
+                      <a:pPr algn="l">
+                        <a:lnSpc>
+                          <a:spcPct val="115000"/>
+                        </a:lnSpc>
+                        <a:buNone/>
+                      </a:pPr>
+                      <a:r>
+                        <a:rPr sz="1000" b="1">
+                          <a:solidFill>
+                            <a:srgbClr val="14223A"/>
+                          </a:solidFill>
+                          <a:latin typeface="Meiryo"/>
+                          <a:cs typeface="Meiryo"/>
+                          <a:ea typeface="Meiryo"/>
+                        </a:rPr>
+                        <a:t>coupon_redemptions</a:t>
+                      </a:r>
+                    </a:p>
+                  </a:txBody>
+                  <a:tcPr marL="64008" marR="64008" marT="27432" marB="27432" anchor="ctr">
+                    <a:solidFill>
+                      <a:srgbClr val="F8FAFC"/>
+                    </a:solidFill>
+                  </a:tcPr>
+                </a:tc>
+                <a:tc>
+                  <a:txBody>
+                    <a:bodyPr wrap="square"/>
+                    <a:lstStyle/>
+                    <a:p>
+                      <a:pPr algn="l">
+                        <a:lnSpc>
+                          <a:spcPct val="115000"/>
+                        </a:lnSpc>
+                        <a:buNone/>
+                      </a:pPr>
+                      <a:r>
+                        <a:rPr sz="1000" b="0">
+                          <a:solidFill>
+                            <a:srgbClr val="14223A"/>
+                          </a:solidFill>
+                          <a:latin typeface="Meiryo"/>
+                          <a:cs typeface="Meiryo"/>
+                          <a:ea typeface="Meiryo"/>
+                        </a:rPr>
+                        <a:t>日報1件への割引クーポン適用記録</a:t>
+                      </a:r>
+                    </a:p>
+                  </a:txBody>
+                  <a:tcPr marL="64008" marR="64008" marT="27432" marB="27432" anchor="ctr">
+                    <a:solidFill>
+                      <a:srgbClr val="F8FAFC"/>
+                    </a:solidFill>
+                  </a:tcPr>
+                </a:tc>
+                <a:tc>
+                  <a:txBody>
+                    <a:bodyPr wrap="square"/>
+                    <a:lstStyle/>
+                    <a:p>
+                      <a:pPr algn="l">
+                        <a:lnSpc>
+                          <a:spcPct val="115000"/>
+                        </a:lnSpc>
+                        <a:buNone/>
+                      </a:pPr>
+                      <a:r>
+                        <a:rPr sz="1000" b="0">
+                          <a:solidFill>
+                            <a:srgbClr val="14223A"/>
+                          </a:solidFill>
+                          <a:latin typeface="Meiryo"/>
+                          <a:cs typeface="Meiryo"/>
+                          <a:ea typeface="Meiryo"/>
+                        </a:rPr>
+                        <a:t>UNIQUE(tenant_id, daily_report_id, coupon_id)</a:t>
+                      </a:r>
+                    </a:p>
+                  </a:txBody>
+                  <a:tcPr marL="64008" marR="64008" marT="27432" marB="27432" anchor="ctr">
+                    <a:solidFill>
+                      <a:srgbClr val="F8FAFC"/>
+                    </a:solidFill>
+                  </a:tcPr>
+                </a:tc>
+                <a:tc>
+                  <a:txBody>
+                    <a:bodyPr wrap="square"/>
+                    <a:lstStyle/>
+                    <a:p>
+                      <a:pPr algn="ctr">
+                        <a:lnSpc>
+                          <a:spcPct val="115000"/>
+                        </a:lnSpc>
+                        <a:buNone/>
+                      </a:pPr>
+                      <a:r>
+                        <a:rPr sz="1000" b="0">
+                          <a:solidFill>
+                            <a:srgbClr val="14223A"/>
+                          </a:solidFill>
+                          <a:latin typeface="Meiryo"/>
+                          <a:cs typeface="Meiryo"/>
+                          <a:ea typeface="Meiryo"/>
+                        </a:rPr>
+                        <a:t>○</a:t>
+                      </a:r>
+                    </a:p>
+                  </a:txBody>
+                  <a:tcPr marL="64008" marR="64008" marT="27432" marB="27432" anchor="ctr">
+                    <a:solidFill>
+                      <a:srgbClr val="F8FAFC"/>
+                    </a:solidFill>
+                  </a:tcPr>
+                </a:tc>
+              </a:tr>
             </a:tbl>
           </a:graphicData>
         </a:graphic>
@@ -49680,7 +50020,7 @@
                 <a:cs typeface="Meiryo"/>
                 <a:ea typeface="Meiryo"/>
               </a:rPr>
-              <a:t>この15枚が「土台」です</a:t>
+              <a:t>この16枚が「土台」です</a:t>
             </a:r>
           </a:p>
         </p:txBody>

--- a/doc/12_データベース構造レビュー資料.pptx
+++ b/doc/12_データベース構造レビュー資料.pptx
@@ -41704,7 +41704,7 @@
                           <a:cs typeface="Meiryo"/>
                           <a:ea typeface="Meiryo"/>
                         </a:rPr>
-                        <a:t>運用前のいまは 0000_baseline_schema の1本。配備後は積み増す</a:t>
+                        <a:t>統合したベースライン 0000 に、0001 以降を積み増していく</a:t>
                       </a:r>
                     </a:p>
                   </a:txBody>

--- a/doc/12_データベース構造レビュー資料.pptx
+++ b/doc/12_データベース構造レビュー資料.pptx
@@ -3326,7 +3326,7 @@
                 <a:cs typeface="Meiryo"/>
                 <a:ea typeface="Meiryo"/>
               </a:rPr>
-              <a:t>訪問保育(ベビーシッター法人)向け業務SaaS — PostgreSQL / 33テーブル</a:t>
+              <a:t>訪問保育(ベビーシッター法人)向け業務SaaS — PostgreSQL / 34テーブル</a:t>
             </a:r>
           </a:p>
         </p:txBody>
@@ -5457,7 +5457,7 @@
                 <a:cs typeface="Meiryo"/>
                 <a:ea typeface="Meiryo"/>
               </a:rPr>
-              <a:t>この18枚も既存15枚と同じ規約(tenant_id + RLS + 複合外部キー + CHECK + updated_at トリガー)に載せてあります。先に作った理由と、そこで迷った判断は第4章(P26・P27)で扱います。</a:t>
+              <a:t>この18枚も既存16枚と同じ規約(tenant_id + RLS + 複合外部キー + CHECK + updated_at トリガー)に載せてあります。先に作った理由と、そこで迷った判断は第4章(P26・P27)で扱います。</a:t>
             </a:r>
           </a:p>
         </p:txBody>
@@ -8523,7 +8523,7 @@
                 <a:cs typeface="Meiryo"/>
                 <a:ea typeface="Meiryo"/>
               </a:rPr>
-              <a:t>静的検査:全33テーブル分のSQLに ENABLE と FORCE、ポリシーの条件が揃っているかを機械的に検査。新しい表を足して書き忘れると落ちる</a:t>
+              <a:t>静的検査:全34テーブル分のSQLに ENABLE と FORCE、ポリシーの条件が揃っているかを機械的に検査。新しい表を足して書き忘れると落ちる</a:t>
             </a:r>
           </a:p>
           <a:p>
@@ -16430,7 +16430,7 @@
                 <a:cs typeface="Meiryo"/>
                 <a:ea typeface="Meiryo"/>
               </a:rPr>
-              <a:t>33テーブルで守っている共通ルール</a:t>
+              <a:t>34テーブルで守っている共通ルール</a:t>
             </a:r>
             <a:r>
               <a:rPr sz="1250" b="0" i="0">
@@ -18873,7 +18873,7 @@
                 <a:cs typeface="Meiryo"/>
                 <a:ea typeface="Meiryo"/>
               </a:rPr>
-              <a:t>問題① customers が37列に肥大化している</a:t>
+              <a:t>問題① customers が39列に肥大化している</a:t>
             </a:r>
             <a:r>
               <a:rPr sz="1250" b="0" i="0">
@@ -19088,7 +19088,7 @@
                 <a:cs typeface="Meiryo"/>
                 <a:ea typeface="Meiryo"/>
               </a:rPr>
-              <a:t>現状:1枚に8カテゴリが同居している</a:t>
+              <a:t>現状:1枚に9カテゴリが同居している</a:t>
             </a:r>
           </a:p>
         </p:txBody>
@@ -19319,7 +19319,7 @@
         </p:nvSpPr>
         <p:spPr>
           <a:xfrm>
-            <a:off x="457200" y="2139696"/>
+            <a:off x="457200" y="2103120"/>
             <a:ext cx="5394960" cy="347472"/>
           </a:xfrm>
           <a:prstGeom prst="roundRect">
@@ -19367,7 +19367,7 @@
         </p:nvSpPr>
         <p:spPr>
           <a:xfrm>
-            <a:off x="457200" y="2139696"/>
+            <a:off x="457200" y="2103120"/>
             <a:ext cx="54864" cy="347472"/>
           </a:xfrm>
           <a:prstGeom prst="rect">
@@ -19411,7 +19411,7 @@
         </p:nvSpPr>
         <p:spPr>
           <a:xfrm>
-            <a:off x="603504" y="2176272"/>
+            <a:off x="603504" y="2139696"/>
             <a:ext cx="1920240" cy="274320"/>
           </a:xfrm>
           <a:prstGeom prst="rect">
@@ -19453,7 +19453,7 @@
         </p:nvSpPr>
         <p:spPr>
           <a:xfrm>
-            <a:off x="2542032" y="2176272"/>
+            <a:off x="2542032" y="2139696"/>
             <a:ext cx="502920" cy="274320"/>
           </a:xfrm>
           <a:prstGeom prst="rect">
@@ -19495,7 +19495,7 @@
         </p:nvSpPr>
         <p:spPr>
           <a:xfrm>
-            <a:off x="3154680" y="2203703"/>
+            <a:off x="3154680" y="2167127"/>
             <a:ext cx="2651760" cy="274320"/>
           </a:xfrm>
           <a:prstGeom prst="rect">
@@ -19537,7 +19537,7 @@
         </p:nvSpPr>
         <p:spPr>
           <a:xfrm>
-            <a:off x="457200" y="2542032"/>
+            <a:off x="457200" y="2468879"/>
             <a:ext cx="5394960" cy="347472"/>
           </a:xfrm>
           <a:prstGeom prst="roundRect">
@@ -19585,7 +19585,7 @@
         </p:nvSpPr>
         <p:spPr>
           <a:xfrm>
-            <a:off x="457200" y="2542032"/>
+            <a:off x="457200" y="2468879"/>
             <a:ext cx="54864" cy="347472"/>
           </a:xfrm>
           <a:prstGeom prst="rect">
@@ -19629,7 +19629,7 @@
         </p:nvSpPr>
         <p:spPr>
           <a:xfrm>
-            <a:off x="603504" y="2578608"/>
+            <a:off x="603504" y="2505456"/>
             <a:ext cx="1920240" cy="274320"/>
           </a:xfrm>
           <a:prstGeom prst="rect">
@@ -19671,7 +19671,7 @@
         </p:nvSpPr>
         <p:spPr>
           <a:xfrm>
-            <a:off x="2542032" y="2578608"/>
+            <a:off x="2542032" y="2505456"/>
             <a:ext cx="502920" cy="274320"/>
           </a:xfrm>
           <a:prstGeom prst="rect">
@@ -19713,7 +19713,7 @@
         </p:nvSpPr>
         <p:spPr>
           <a:xfrm>
-            <a:off x="3154680" y="2606039"/>
+            <a:off x="3154680" y="2532887"/>
             <a:ext cx="2651760" cy="274320"/>
           </a:xfrm>
           <a:prstGeom prst="rect">
@@ -19755,7 +19755,7 @@
         </p:nvSpPr>
         <p:spPr>
           <a:xfrm>
-            <a:off x="457200" y="2944368"/>
+            <a:off x="457200" y="2834639"/>
             <a:ext cx="5394960" cy="347472"/>
           </a:xfrm>
           <a:prstGeom prst="roundRect">
@@ -19803,7 +19803,7 @@
         </p:nvSpPr>
         <p:spPr>
           <a:xfrm>
-            <a:off x="457200" y="2944368"/>
+            <a:off x="457200" y="2834639"/>
             <a:ext cx="54864" cy="347472"/>
           </a:xfrm>
           <a:prstGeom prst="rect">
@@ -19847,7 +19847,7 @@
         </p:nvSpPr>
         <p:spPr>
           <a:xfrm>
-            <a:off x="603504" y="2980944"/>
+            <a:off x="603504" y="2871215"/>
             <a:ext cx="1920240" cy="274320"/>
           </a:xfrm>
           <a:prstGeom prst="rect">
@@ -19889,7 +19889,7 @@
         </p:nvSpPr>
         <p:spPr>
           <a:xfrm>
-            <a:off x="2542032" y="2980944"/>
+            <a:off x="2542032" y="2871215"/>
             <a:ext cx="502920" cy="274320"/>
           </a:xfrm>
           <a:prstGeom prst="rect">
@@ -19931,7 +19931,7 @@
         </p:nvSpPr>
         <p:spPr>
           <a:xfrm>
-            <a:off x="3154680" y="3008375"/>
+            <a:off x="3154680" y="2898647"/>
             <a:ext cx="2651760" cy="274320"/>
           </a:xfrm>
           <a:prstGeom prst="rect">
@@ -19973,7 +19973,7 @@
         </p:nvSpPr>
         <p:spPr>
           <a:xfrm>
-            <a:off x="457200" y="3346703"/>
+            <a:off x="457200" y="3200399"/>
             <a:ext cx="5394960" cy="347472"/>
           </a:xfrm>
           <a:prstGeom prst="roundRect">
@@ -20021,7 +20021,7 @@
         </p:nvSpPr>
         <p:spPr>
           <a:xfrm>
-            <a:off x="457200" y="3346703"/>
+            <a:off x="457200" y="3200399"/>
             <a:ext cx="54864" cy="347472"/>
           </a:xfrm>
           <a:prstGeom prst="rect">
@@ -20065,7 +20065,7 @@
         </p:nvSpPr>
         <p:spPr>
           <a:xfrm>
-            <a:off x="603504" y="3383279"/>
+            <a:off x="603504" y="3236975"/>
             <a:ext cx="1920240" cy="274320"/>
           </a:xfrm>
           <a:prstGeom prst="rect">
@@ -20107,7 +20107,7 @@
         </p:nvSpPr>
         <p:spPr>
           <a:xfrm>
-            <a:off x="2542032" y="3383279"/>
+            <a:off x="2542032" y="3236975"/>
             <a:ext cx="502920" cy="274320"/>
           </a:xfrm>
           <a:prstGeom prst="rect">
@@ -20149,7 +20149,7 @@
         </p:nvSpPr>
         <p:spPr>
           <a:xfrm>
-            <a:off x="3154680" y="3410711"/>
+            <a:off x="3154680" y="3264407"/>
             <a:ext cx="2651760" cy="274320"/>
           </a:xfrm>
           <a:prstGeom prst="rect">
@@ -20191,7 +20191,7 @@
         </p:nvSpPr>
         <p:spPr>
           <a:xfrm>
-            <a:off x="457200" y="3749039"/>
+            <a:off x="457200" y="3566159"/>
             <a:ext cx="5394960" cy="347472"/>
           </a:xfrm>
           <a:prstGeom prst="roundRect">
@@ -20239,7 +20239,7 @@
         </p:nvSpPr>
         <p:spPr>
           <a:xfrm>
-            <a:off x="457200" y="3749039"/>
+            <a:off x="457200" y="3566159"/>
             <a:ext cx="54864" cy="347472"/>
           </a:xfrm>
           <a:prstGeom prst="rect">
@@ -20283,7 +20283,7 @@
         </p:nvSpPr>
         <p:spPr>
           <a:xfrm>
-            <a:off x="603504" y="3785615"/>
+            <a:off x="603504" y="3602735"/>
             <a:ext cx="1920240" cy="274320"/>
           </a:xfrm>
           <a:prstGeom prst="rect">
@@ -20325,7 +20325,7 @@
         </p:nvSpPr>
         <p:spPr>
           <a:xfrm>
-            <a:off x="2542032" y="3785615"/>
+            <a:off x="2542032" y="3602735"/>
             <a:ext cx="502920" cy="274320"/>
           </a:xfrm>
           <a:prstGeom prst="rect">
@@ -20367,7 +20367,7 @@
         </p:nvSpPr>
         <p:spPr>
           <a:xfrm>
-            <a:off x="3154680" y="3813048"/>
+            <a:off x="3154680" y="3630167"/>
             <a:ext cx="2651760" cy="274320"/>
           </a:xfrm>
           <a:prstGeom prst="rect">
@@ -20409,7 +20409,7 @@
         </p:nvSpPr>
         <p:spPr>
           <a:xfrm>
-            <a:off x="457200" y="4151376"/>
+            <a:off x="457200" y="3931920"/>
             <a:ext cx="5394960" cy="347472"/>
           </a:xfrm>
           <a:prstGeom prst="roundRect">
@@ -20457,7 +20457,7 @@
         </p:nvSpPr>
         <p:spPr>
           <a:xfrm>
-            <a:off x="457200" y="4151376"/>
+            <a:off x="457200" y="3931920"/>
             <a:ext cx="54864" cy="347472"/>
           </a:xfrm>
           <a:prstGeom prst="rect">
@@ -20501,7 +20501,7 @@
         </p:nvSpPr>
         <p:spPr>
           <a:xfrm>
-            <a:off x="603504" y="4187952"/>
+            <a:off x="603504" y="3968496"/>
             <a:ext cx="1920240" cy="274320"/>
           </a:xfrm>
           <a:prstGeom prst="rect">
@@ -20543,7 +20543,7 @@
         </p:nvSpPr>
         <p:spPr>
           <a:xfrm>
-            <a:off x="2542032" y="4187952"/>
+            <a:off x="2542032" y="3968496"/>
             <a:ext cx="502920" cy="274320"/>
           </a:xfrm>
           <a:prstGeom prst="rect">
@@ -20585,7 +20585,7 @@
         </p:nvSpPr>
         <p:spPr>
           <a:xfrm>
-            <a:off x="3154680" y="4215384"/>
+            <a:off x="3154680" y="3995928"/>
             <a:ext cx="2651760" cy="274320"/>
           </a:xfrm>
           <a:prstGeom prst="rect">
@@ -20627,7 +20627,7 @@
         </p:nvSpPr>
         <p:spPr>
           <a:xfrm>
-            <a:off x="457200" y="4553712"/>
+            <a:off x="457200" y="4297680"/>
             <a:ext cx="5394960" cy="347472"/>
           </a:xfrm>
           <a:prstGeom prst="roundRect">
@@ -20675,7 +20675,225 @@
         </p:nvSpPr>
         <p:spPr>
           <a:xfrm>
-            <a:off x="457200" y="4553712"/>
+            <a:off x="457200" y="4297680"/>
+            <a:ext cx="54864" cy="347472"/>
+          </a:xfrm>
+          <a:prstGeom prst="rect">
+            <a:avLst/>
+          </a:prstGeom>
+          <a:solidFill>
+            <a:srgbClr val="047857"/>
+          </a:solidFill>
+          <a:ln>
+            <a:noFill/>
+          </a:ln>
+          <a:effectLst/>
+        </p:spPr>
+        <p:style>
+          <a:lnRef idx="1">
+            <a:schemeClr val="accent1"/>
+          </a:lnRef>
+          <a:fillRef idx="3">
+            <a:schemeClr val="accent1"/>
+          </a:fillRef>
+          <a:effectRef idx="2">
+            <a:schemeClr val="accent1"/>
+          </a:effectRef>
+          <a:fontRef idx="minor">
+            <a:schemeClr val="lt1"/>
+          </a:fontRef>
+        </p:style>
+        <p:txBody>
+          <a:bodyPr rtlCol="0" anchor="ctr" wrap="square"/>
+          <a:lstStyle/>
+          <a:p>
+            <a:pPr algn="ctr"/>
+          </a:p>
+        </p:txBody>
+      </p:sp>
+      <p:sp>
+        <p:nvSpPr>
+          <p:cNvPr id="46" name="TextBox 45"/>
+          <p:cNvSpPr txBox="1"/>
+          <p:nvPr/>
+        </p:nvSpPr>
+        <p:spPr>
+          <a:xfrm>
+            <a:off x="603504" y="4334256"/>
+            <a:ext cx="1920240" cy="274320"/>
+          </a:xfrm>
+          <a:prstGeom prst="rect">
+            <a:avLst/>
+          </a:prstGeom>
+          <a:noFill/>
+        </p:spPr>
+        <p:txBody>
+          <a:bodyPr wrap="square" lIns="0" rIns="0" tIns="0" bIns="0" anchor="t">
+            <a:spAutoFit/>
+          </a:bodyPr>
+          <a:lstStyle/>
+          <a:p>
+            <a:pPr algn="l">
+              <a:lnSpc>
+                <a:spcPct val="125000"/>
+              </a:lnSpc>
+              <a:buNone/>
+            </a:pPr>
+            <a:r>
+              <a:rPr sz="1050" b="1" i="0">
+                <a:solidFill>
+                  <a:srgbClr val="047857"/>
+                </a:solidFill>
+                <a:latin typeface="Meiryo"/>
+                <a:cs typeface="Meiryo"/>
+                <a:ea typeface="Meiryo"/>
+              </a:rPr>
+              <a:t>生年月日</a:t>
+            </a:r>
+          </a:p>
+        </p:txBody>
+      </p:sp>
+      <p:sp>
+        <p:nvSpPr>
+          <p:cNvPr id="47" name="TextBox 46"/>
+          <p:cNvSpPr txBox="1"/>
+          <p:nvPr/>
+        </p:nvSpPr>
+        <p:spPr>
+          <a:xfrm>
+            <a:off x="2542032" y="4334256"/>
+            <a:ext cx="502920" cy="274320"/>
+          </a:xfrm>
+          <a:prstGeom prst="rect">
+            <a:avLst/>
+          </a:prstGeom>
+          <a:noFill/>
+        </p:spPr>
+        <p:txBody>
+          <a:bodyPr wrap="square" lIns="0" rIns="0" tIns="0" bIns="0" anchor="t">
+            <a:spAutoFit/>
+          </a:bodyPr>
+          <a:lstStyle/>
+          <a:p>
+            <a:pPr algn="r">
+              <a:lnSpc>
+                <a:spcPct val="125000"/>
+              </a:lnSpc>
+              <a:buNone/>
+            </a:pPr>
+            <a:r>
+              <a:rPr sz="1050" b="1" i="0">
+                <a:solidFill>
+                  <a:srgbClr val="14223A"/>
+                </a:solidFill>
+                <a:latin typeface="Meiryo"/>
+                <a:cs typeface="Meiryo"/>
+                <a:ea typeface="Meiryo"/>
+              </a:rPr>
+              <a:t>2列</a:t>
+            </a:r>
+          </a:p>
+        </p:txBody>
+      </p:sp>
+      <p:sp>
+        <p:nvSpPr>
+          <p:cNvPr id="48" name="TextBox 47"/>
+          <p:cNvSpPr txBox="1"/>
+          <p:nvPr/>
+        </p:nvSpPr>
+        <p:spPr>
+          <a:xfrm>
+            <a:off x="3154680" y="4361688"/>
+            <a:ext cx="2651760" cy="274320"/>
+          </a:xfrm>
+          <a:prstGeom prst="rect">
+            <a:avLst/>
+          </a:prstGeom>
+          <a:noFill/>
+        </p:spPr>
+        <p:txBody>
+          <a:bodyPr wrap="square" lIns="0" rIns="0" tIns="0" bIns="0" anchor="t">
+            <a:spAutoFit/>
+          </a:bodyPr>
+          <a:lstStyle/>
+          <a:p>
+            <a:pPr algn="l">
+              <a:lnSpc>
+                <a:spcPct val="125000"/>
+              </a:lnSpc>
+              <a:buNone/>
+            </a:pPr>
+            <a:r>
+              <a:rPr sz="900" b="0" i="0">
+                <a:solidFill>
+                  <a:srgbClr val="64748B"/>
+                </a:solidFill>
+                <a:latin typeface="Meiryo"/>
+                <a:cs typeface="Meiryo"/>
+                <a:ea typeface="Meiryo"/>
+              </a:rPr>
+              <a:t>日付型 / 元表記(誕生月クーポン用・手入力)</a:t>
+            </a:r>
+          </a:p>
+        </p:txBody>
+      </p:sp>
+      <p:sp>
+        <p:nvSpPr>
+          <p:cNvPr id="49" name="Rounded Rectangle 48"/>
+          <p:cNvSpPr/>
+          <p:nvPr/>
+        </p:nvSpPr>
+        <p:spPr>
+          <a:xfrm>
+            <a:off x="457200" y="4663440"/>
+            <a:ext cx="5394960" cy="347472"/>
+          </a:xfrm>
+          <a:prstGeom prst="roundRect">
+            <a:avLst>
+              <a:gd name="adj" fmla="val 12000"/>
+            </a:avLst>
+          </a:prstGeom>
+          <a:solidFill>
+            <a:srgbClr val="FFFFFF"/>
+          </a:solidFill>
+          <a:ln w="12700">
+            <a:solidFill>
+              <a:srgbClr val="CBD5E1"/>
+            </a:solidFill>
+          </a:ln>
+          <a:effectLst/>
+        </p:spPr>
+        <p:style>
+          <a:lnRef idx="1">
+            <a:schemeClr val="accent1"/>
+          </a:lnRef>
+          <a:fillRef idx="3">
+            <a:schemeClr val="accent1"/>
+          </a:fillRef>
+          <a:effectRef idx="2">
+            <a:schemeClr val="accent1"/>
+          </a:effectRef>
+          <a:fontRef idx="minor">
+            <a:schemeClr val="lt1"/>
+          </a:fontRef>
+        </p:style>
+        <p:txBody>
+          <a:bodyPr rtlCol="0" anchor="ctr" wrap="square"/>
+          <a:lstStyle/>
+          <a:p>
+            <a:pPr algn="ctr"/>
+          </a:p>
+        </p:txBody>
+      </p:sp>
+      <p:sp>
+        <p:nvSpPr>
+          <p:cNvPr id="50" name="Rectangle 49"/>
+          <p:cNvSpPr/>
+          <p:nvPr/>
+        </p:nvSpPr>
+        <p:spPr>
+          <a:xfrm>
+            <a:off x="457200" y="4663440"/>
             <a:ext cx="54864" cy="347472"/>
           </a:xfrm>
           <a:prstGeom prst="rect">
@@ -20713,13 +20931,13 @@
       </p:sp>
       <p:sp>
         <p:nvSpPr>
-          <p:cNvPr id="46" name="TextBox 45"/>
+          <p:cNvPr id="51" name="TextBox 50"/>
           <p:cNvSpPr txBox="1"/>
           <p:nvPr/>
         </p:nvSpPr>
         <p:spPr>
           <a:xfrm>
-            <a:off x="603504" y="4590288"/>
+            <a:off x="603504" y="4700016"/>
             <a:ext cx="1920240" cy="274320"/>
           </a:xfrm>
           <a:prstGeom prst="rect">
@@ -20755,13 +20973,13 @@
       </p:sp>
       <p:sp>
         <p:nvSpPr>
-          <p:cNvPr id="47" name="TextBox 46"/>
+          <p:cNvPr id="52" name="TextBox 51"/>
           <p:cNvSpPr txBox="1"/>
           <p:nvPr/>
         </p:nvSpPr>
         <p:spPr>
           <a:xfrm>
-            <a:off x="2542032" y="4590288"/>
+            <a:off x="2542032" y="4700016"/>
             <a:ext cx="502920" cy="274320"/>
           </a:xfrm>
           <a:prstGeom prst="rect">
@@ -20797,13 +21015,13 @@
       </p:sp>
       <p:sp>
         <p:nvSpPr>
-          <p:cNvPr id="48" name="TextBox 47"/>
+          <p:cNvPr id="53" name="TextBox 52"/>
           <p:cNvSpPr txBox="1"/>
           <p:nvPr/>
         </p:nvSpPr>
         <p:spPr>
           <a:xfrm>
-            <a:off x="3154680" y="4617720"/>
+            <a:off x="3154680" y="4727448"/>
             <a:ext cx="2651760" cy="274320"/>
           </a:xfrm>
           <a:prstGeom prst="rect">
@@ -20839,13 +21057,13 @@
       </p:sp>
       <p:sp>
         <p:nvSpPr>
-          <p:cNvPr id="49" name="Rounded Rectangle 48"/>
+          <p:cNvPr id="54" name="Rounded Rectangle 53"/>
           <p:cNvSpPr/>
           <p:nvPr/>
         </p:nvSpPr>
         <p:spPr>
           <a:xfrm>
-            <a:off x="457200" y="4956048"/>
+            <a:off x="457200" y="5029200"/>
             <a:ext cx="5394960" cy="329184"/>
           </a:xfrm>
           <a:prstGeom prst="roundRect">
@@ -20894,14 +21112,14 @@
                 <a:cs typeface="Meiryo"/>
                 <a:ea typeface="Meiryo"/>
               </a:rPr>
-              <a:t>合計 37列(1テーブル)</a:t>
-            </a:r>
-          </a:p>
-        </p:txBody>
-      </p:sp>
-      <p:sp>
-        <p:nvSpPr>
-          <p:cNvPr id="50" name="TextBox 49"/>
+              <a:t>合計 39列(1テーブル)</a:t>
+            </a:r>
+          </a:p>
+        </p:txBody>
+      </p:sp>
+      <p:sp>
+        <p:nvSpPr>
+          <p:cNvPr id="55" name="TextBox 54"/>
           <p:cNvSpPr txBox="1"/>
           <p:nvPr/>
         </p:nvSpPr>
@@ -20943,7 +21161,7 @@
       </p:sp>
       <p:sp>
         <p:nvSpPr>
-          <p:cNvPr id="51" name="Rounded Rectangle 50"/>
+          <p:cNvPr id="56" name="Rounded Rectangle 55"/>
           <p:cNvSpPr/>
           <p:nvPr/>
         </p:nvSpPr>
@@ -20991,7 +21209,7 @@
       </p:sp>
       <p:sp>
         <p:nvSpPr>
-          <p:cNvPr id="52" name="TextBox 51"/>
+          <p:cNvPr id="57" name="TextBox 56"/>
           <p:cNvSpPr txBox="1"/>
           <p:nvPr/>
         </p:nvSpPr>
@@ -21033,7 +21251,7 @@
       </p:sp>
       <p:sp>
         <p:nvSpPr>
-          <p:cNvPr id="53" name="TextBox 52"/>
+          <p:cNvPr id="58" name="TextBox 57"/>
           <p:cNvSpPr txBox="1"/>
           <p:nvPr/>
         </p:nvSpPr>
@@ -21075,7 +21293,7 @@
       </p:sp>
       <p:sp>
         <p:nvSpPr>
-          <p:cNvPr id="54" name="Rounded Rectangle 53"/>
+          <p:cNvPr id="59" name="Rounded Rectangle 58"/>
           <p:cNvSpPr/>
           <p:nvPr/>
         </p:nvSpPr>
@@ -21123,7 +21341,7 @@
       </p:sp>
       <p:sp>
         <p:nvSpPr>
-          <p:cNvPr id="55" name="TextBox 54"/>
+          <p:cNvPr id="60" name="TextBox 59"/>
           <p:cNvSpPr txBox="1"/>
           <p:nvPr/>
         </p:nvSpPr>
@@ -21165,7 +21383,7 @@
       </p:sp>
       <p:sp>
         <p:nvSpPr>
-          <p:cNvPr id="56" name="TextBox 55"/>
+          <p:cNvPr id="61" name="TextBox 60"/>
           <p:cNvSpPr txBox="1"/>
           <p:nvPr/>
         </p:nvSpPr>
@@ -21207,7 +21425,7 @@
       </p:sp>
       <p:sp>
         <p:nvSpPr>
-          <p:cNvPr id="57" name="Rounded Rectangle 56"/>
+          <p:cNvPr id="62" name="Rounded Rectangle 61"/>
           <p:cNvSpPr/>
           <p:nvPr/>
         </p:nvSpPr>
@@ -21255,7 +21473,7 @@
       </p:sp>
       <p:sp>
         <p:nvSpPr>
-          <p:cNvPr id="58" name="TextBox 57"/>
+          <p:cNvPr id="63" name="TextBox 62"/>
           <p:cNvSpPr txBox="1"/>
           <p:nvPr/>
         </p:nvSpPr>
@@ -21297,7 +21515,7 @@
       </p:sp>
       <p:sp>
         <p:nvSpPr>
-          <p:cNvPr id="59" name="TextBox 58"/>
+          <p:cNvPr id="64" name="TextBox 63"/>
           <p:cNvSpPr txBox="1"/>
           <p:nvPr/>
         </p:nvSpPr>
@@ -21339,7 +21557,7 @@
       </p:sp>
       <p:sp>
         <p:nvSpPr>
-          <p:cNvPr id="60" name="Rounded Rectangle 59"/>
+          <p:cNvPr id="65" name="Rounded Rectangle 64"/>
           <p:cNvSpPr/>
           <p:nvPr/>
         </p:nvSpPr>
@@ -21387,7 +21605,7 @@
       </p:sp>
       <p:sp>
         <p:nvSpPr>
-          <p:cNvPr id="61" name="TextBox 60"/>
+          <p:cNvPr id="66" name="TextBox 65"/>
           <p:cNvSpPr txBox="1"/>
           <p:nvPr/>
         </p:nvSpPr>
@@ -21429,7 +21647,7 @@
       </p:sp>
       <p:sp>
         <p:nvSpPr>
-          <p:cNvPr id="62" name="TextBox 61"/>
+          <p:cNvPr id="67" name="TextBox 66"/>
           <p:cNvSpPr txBox="1"/>
           <p:nvPr/>
         </p:nvSpPr>
@@ -21471,7 +21689,7 @@
       </p:sp>
       <p:sp>
         <p:nvSpPr>
-          <p:cNvPr id="63" name="Rounded Rectangle 62"/>
+          <p:cNvPr id="68" name="Rounded Rectangle 67"/>
           <p:cNvSpPr/>
           <p:nvPr/>
         </p:nvSpPr>
@@ -21519,7 +21737,7 @@
       </p:sp>
       <p:sp>
         <p:nvSpPr>
-          <p:cNvPr id="64" name="Rectangle 63"/>
+          <p:cNvPr id="69" name="Rectangle 68"/>
           <p:cNvSpPr/>
           <p:nvPr/>
         </p:nvSpPr>
@@ -21563,7 +21781,7 @@
       </p:sp>
       <p:sp>
         <p:nvSpPr>
-          <p:cNvPr id="65" name="TextBox 64"/>
+          <p:cNvPr id="70" name="TextBox 69"/>
           <p:cNvSpPr txBox="1"/>
           <p:nvPr/>
         </p:nvSpPr>
@@ -21605,7 +21823,7 @@
       </p:sp>
       <p:sp>
         <p:nvSpPr>
-          <p:cNvPr id="66" name="TextBox 65"/>
+          <p:cNvPr id="71" name="TextBox 70"/>
           <p:cNvSpPr txBox="1"/>
           <p:nvPr/>
         </p:nvSpPr>
@@ -21706,7 +21924,7 @@
       </p:sp>
       <p:sp>
         <p:nvSpPr>
-          <p:cNvPr id="67" name="Rounded Rectangle 66"/>
+          <p:cNvPr id="72" name="Rounded Rectangle 71"/>
           <p:cNvSpPr/>
           <p:nvPr/>
         </p:nvSpPr>
@@ -21752,7 +21970,7 @@
       </p:sp>
       <p:sp>
         <p:nvSpPr>
-          <p:cNvPr id="68" name="Rectangle 67"/>
+          <p:cNvPr id="73" name="Rectangle 72"/>
           <p:cNvSpPr/>
           <p:nvPr/>
         </p:nvSpPr>
@@ -21796,7 +22014,7 @@
       </p:sp>
       <p:sp>
         <p:nvSpPr>
-          <p:cNvPr id="69" name="TextBox 68"/>
+          <p:cNvPr id="74" name="TextBox 73"/>
           <p:cNvSpPr txBox="1"/>
           <p:nvPr/>
         </p:nvSpPr>
@@ -21838,7 +22056,7 @@
       </p:sp>
       <p:sp>
         <p:nvSpPr>
-          <p:cNvPr id="70" name="TextBox 69"/>
+          <p:cNvPr id="75" name="TextBox 74"/>
           <p:cNvSpPr txBox="1"/>
           <p:nvPr/>
         </p:nvSpPr>
@@ -21873,7 +22091,7 @@
                 <a:cs typeface="Meiryo"/>
                 <a:ea typeface="Meiryo"/>
               </a:rPr>
-              <a:t>「37列は多すぎるので分けるべき」か、「顧客マスタなら37列は普通で分けるほうが害」か。判断の基準(何列を超えたら、どういう単位で分けるか)をご教示いただきたいです。運用前なので、分けるなら今が最も安いタイミングです。</a:t>
+              <a:t>「39列は多すぎるので分けるべき」か、「顧客マスタなら39列は普通で分けるほうが害」か。判断の基準(何列を超えたら、どういう単位で分けるか)をご教示いただきたいです。運用前なので、分けるなら今が最も安いタイミングです。</a:t>
             </a:r>
           </a:p>
         </p:txBody>
@@ -23363,7 +23581,7 @@
                 <a:cs typeface="Meiryo"/>
                 <a:ea typeface="Meiryo"/>
               </a:rPr>
-              <a:t>33テーブルの全体像と、
+              <a:t>34テーブルの全体像と、
 テナント分離・データ保護</a:t>
             </a:r>
           </a:p>
@@ -23622,7 +23840,7 @@
                 <a:cs typeface="Meiryo"/>
                 <a:ea typeface="Meiryo"/>
               </a:rPr>
-              <a:t>customers 37列の肥大化ほか
+              <a:t>customers 39列の肥大化ほか
 6件を自己申告</a:t>
             </a:r>
           </a:p>
@@ -33889,7 +34107,7 @@
                 <a:cs typeface="Meiryo"/>
                 <a:ea typeface="Meiryo"/>
               </a:rPr>
-              <a:t>既存15枚と同じ規約に載せてある</a:t>
+              <a:t>既存16枚と同じ規約に載せてある</a:t>
             </a:r>
           </a:p>
         </p:txBody>
@@ -35840,7 +36058,7 @@
                           <a:cs typeface="Meiryo"/>
                           <a:ea typeface="Meiryo"/>
                         </a:rPr>
-                        <a:t>customers 37列を分けるべきか</a:t>
+                        <a:t>customers 39列を分けるべきか</a:t>
                       </a:r>
                     </a:p>
                   </a:txBody>
@@ -37447,7 +37665,7 @@
                 <a:cs typeface="Meiryo"/>
                 <a:ea typeface="Meiryo"/>
               </a:rPr>
-              <a:t>  33テーブルの定義。列ごとに「なぜこの形か」をコメントで書いてある</a:t>
+              <a:t>  34テーブルの定義。列ごとに「なぜこの形か」をコメントで書いてある</a:t>
             </a:r>
           </a:p>
           <a:p>
@@ -37558,7 +37776,7 @@
                 <a:cs typeface="Meiryo"/>
                 <a:ea typeface="Meiryo"/>
               </a:rPr>
-              <a:t>  業務ロジックが外部に求める窓口の定義(28本)</a:t>
+              <a:t>  業務ロジックが外部に求める窓口の定義(29本)</a:t>
             </a:r>
           </a:p>
         </p:txBody>
@@ -41486,7 +41704,7 @@
                           <a:cs typeface="Meiryo"/>
                           <a:ea typeface="Meiryo"/>
                         </a:rPr>
-                        <a:t>運用前のいまは 0000_baseline_schema の1本。配備後は積み増す</a:t>
+                        <a:t>統合したベースライン 0000 に、0001 以降を積み増していく</a:t>
                       </a:r>
                     </a:p>
                   </a:txBody>
@@ -42744,7 +42962,7 @@
                 <a:cs typeface="Meiryo"/>
                 <a:ea typeface="Meiryo"/>
               </a:rPr>
-              <a:t>33テーブルの全体像と、テナント分離・データ保護・トランザクションの考え方</a:t>
+              <a:t>34テーブルの全体像と、テナント分離・データ保護・トランザクションの考え方</a:t>
             </a:r>
           </a:p>
         </p:txBody>
@@ -44998,7 +45216,7 @@
                 <a:cs typeface="Meiryo"/>
                 <a:ea typeface="Meiryo"/>
               </a:rPr>
-              <a:t>全体像 — 33テーブル</a:t>
+              <a:t>全体像 — 34テーブル</a:t>
             </a:r>
             <a:r>
               <a:rPr sz="1250" b="0" i="0">
@@ -45009,7 +45227,7 @@
                 <a:cs typeface="Meiryo"/>
                 <a:ea typeface="Meiryo"/>
               </a:rPr>
-              <a:t>   業務ドメインごとに10のまとまり。tenants以外の32枚はすべて同じ形を守る</a:t>
+              <a:t>   業務ドメインごとに10のまとまり。tenants以外の33枚はすべて同じ形を守る</a:t>
             </a:r>
           </a:p>
         </p:txBody>
@@ -45419,7 +45637,7 @@
                 <a:cs typeface="Meiryo"/>
                 <a:ea typeface="Meiryo"/>
               </a:rPr>
-              <a:t>稼働中 — アプリが読み書きしている15枚</a:t>
+              <a:t>稼働中 — アプリが読み書きしている16枚</a:t>
             </a:r>
           </a:p>
         </p:txBody>
@@ -46136,7 +46354,7 @@
                 <a:cs typeface="Meiryo"/>
                 <a:ea typeface="Meiryo"/>
               </a:rPr>
-              <a:t>割引クーポン (2)</a:t>
+              <a:t>割引クーポン (3)</a:t>
             </a:r>
           </a:p>
         </p:txBody>
@@ -46179,6 +46397,7 @@
                 <a:ea typeface="Consolas"/>
               </a:rPr>
               <a:t>coupons
+customer_coupons
 coupon_redemptions</a:t>
             </a:r>
           </a:p>
@@ -47262,7 +47481,7 @@
                 <a:cs typeface="Meiryo"/>
                 <a:ea typeface="Meiryo"/>
               </a:rPr>
-              <a:t>テーブル一覧① — 稼働中の15枚</a:t>
+              <a:t>テーブル一覧① — 稼働中の16枚</a:t>
             </a:r>
             <a:r>
               <a:rPr sz="1250" b="0" i="0">
@@ -47408,7 +47627,7 @@
         </p:nvGraphicFramePr>
         <p:xfrm>
           <a:off x="457200" y="1143000"/>
-          <a:ext cx="11277293" cy="4279392"/>
+          <a:ext cx="11277293" cy="4251960"/>
         </p:xfrm>
         <a:graphic>
           <a:graphicData uri="http://schemas.openxmlformats.org/drawingml/2006/table">
@@ -47544,7 +47763,7 @@
                   </a:tcPr>
                 </a:tc>
               </a:tr>
-              <a:tr h="265176">
+              <a:tr h="246888">
                 <a:tc>
                   <a:txBody>
                     <a:bodyPr wrap="square"/>
@@ -47666,7 +47885,7 @@
                   </a:tcPr>
                 </a:tc>
               </a:tr>
-              <a:tr h="265176">
+              <a:tr h="246888">
                 <a:tc>
                   <a:txBody>
                     <a:bodyPr wrap="square"/>
@@ -47788,7 +48007,7 @@
                   </a:tcPr>
                 </a:tc>
               </a:tr>
-              <a:tr h="265176">
+              <a:tr h="246888">
                 <a:tc>
                   <a:txBody>
                     <a:bodyPr wrap="square"/>
@@ -47910,7 +48129,7 @@
                   </a:tcPr>
                 </a:tc>
               </a:tr>
-              <a:tr h="265176">
+              <a:tr h="246888">
                 <a:tc>
                   <a:txBody>
                     <a:bodyPr wrap="square"/>
@@ -48032,7 +48251,7 @@
                   </a:tcPr>
                 </a:tc>
               </a:tr>
-              <a:tr h="265176">
+              <a:tr h="246888">
                 <a:tc>
                   <a:txBody>
                     <a:bodyPr wrap="square"/>
@@ -48154,7 +48373,7 @@
                   </a:tcPr>
                 </a:tc>
               </a:tr>
-              <a:tr h="265176">
+              <a:tr h="246888">
                 <a:tc>
                   <a:txBody>
                     <a:bodyPr wrap="square"/>
@@ -48276,7 +48495,7 @@
                   </a:tcPr>
                 </a:tc>
               </a:tr>
-              <a:tr h="265176">
+              <a:tr h="246888">
                 <a:tc>
                   <a:txBody>
                     <a:bodyPr wrap="square"/>
@@ -48398,7 +48617,7 @@
                   </a:tcPr>
                 </a:tc>
               </a:tr>
-              <a:tr h="265176">
+              <a:tr h="246888">
                 <a:tc>
                   <a:txBody>
                     <a:bodyPr wrap="square"/>
@@ -48449,7 +48668,7 @@
                           <a:cs typeface="Meiryo"/>
                           <a:ea typeface="Meiryo"/>
                         </a:rPr>
-                        <a:t>顧客(利用世帯の代表者)。37列</a:t>
+                        <a:t>顧客(利用世帯の代表者)。39列</a:t>
                       </a:r>
                     </a:p>
                   </a:txBody>
@@ -48520,7 +48739,7 @@
                   </a:tcPr>
                 </a:tc>
               </a:tr>
-              <a:tr h="265176">
+              <a:tr h="246888">
                 <a:tc>
                   <a:txBody>
                     <a:bodyPr wrap="square"/>
@@ -48642,7 +48861,7 @@
                   </a:tcPr>
                 </a:tc>
               </a:tr>
-              <a:tr h="265176">
+              <a:tr h="246888">
                 <a:tc>
                   <a:txBody>
                     <a:bodyPr wrap="square"/>
@@ -48764,7 +48983,7 @@
                   </a:tcPr>
                 </a:tc>
               </a:tr>
-              <a:tr h="265176">
+              <a:tr h="246888">
                 <a:tc>
                   <a:txBody>
                     <a:bodyPr wrap="square"/>
@@ -48886,7 +49105,7 @@
                   </a:tcPr>
                 </a:tc>
               </a:tr>
-              <a:tr h="265176">
+              <a:tr h="246888">
                 <a:tc>
                   <a:txBody>
                     <a:bodyPr wrap="square"/>
@@ -49008,7 +49227,7 @@
                   </a:tcPr>
                 </a:tc>
               </a:tr>
-              <a:tr h="265176">
+              <a:tr h="246888">
                 <a:tc>
                   <a:txBody>
                     <a:bodyPr wrap="square"/>
@@ -49130,7 +49349,7 @@
                   </a:tcPr>
                 </a:tc>
               </a:tr>
-              <a:tr h="265176">
+              <a:tr h="246888">
                 <a:tc>
                   <a:txBody>
                     <a:bodyPr wrap="square"/>
@@ -49252,7 +49471,7 @@
                   </a:tcPr>
                 </a:tc>
               </a:tr>
-              <a:tr h="265176">
+              <a:tr h="246888">
                 <a:tc>
                   <a:txBody>
                     <a:bodyPr wrap="square"/>
@@ -49273,7 +49492,7 @@
                           <a:cs typeface="Meiryo"/>
                           <a:ea typeface="Meiryo"/>
                         </a:rPr>
-                        <a:t>coupon_redemptions</a:t>
+                        <a:t>customer_coupons</a:t>
                       </a:r>
                     </a:p>
                   </a:txBody>
@@ -49303,7 +49522,7 @@
                           <a:cs typeface="Meiryo"/>
                           <a:ea typeface="Meiryo"/>
                         </a:rPr>
-                        <a:t>日報1件への割引クーポン適用記録</a:t>
+                        <a:t>顧客へのクーポン配布</a:t>
                       </a:r>
                     </a:p>
                   </a:txBody>
@@ -49333,7 +49552,7 @@
                           <a:cs typeface="Meiryo"/>
                           <a:ea typeface="Meiryo"/>
                         </a:rPr>
-                        <a:t>UNIQUE(tenant_id, daily_report_id, coupon_id)</a:t>
+                        <a:t>UNIQUE(tenant_id, customer_id, coupon_id)</a:t>
                       </a:r>
                     </a:p>
                   </a:txBody>
@@ -49374,6 +49593,128 @@
                   </a:tcPr>
                 </a:tc>
               </a:tr>
+              <a:tr h="246888">
+                <a:tc>
+                  <a:txBody>
+                    <a:bodyPr wrap="square"/>
+                    <a:lstStyle/>
+                    <a:p>
+                      <a:pPr algn="l">
+                        <a:lnSpc>
+                          <a:spcPct val="115000"/>
+                        </a:lnSpc>
+                        <a:buNone/>
+                      </a:pPr>
+                      <a:r>
+                        <a:rPr sz="1000" b="1">
+                          <a:solidFill>
+                            <a:srgbClr val="14223A"/>
+                          </a:solidFill>
+                          <a:latin typeface="Meiryo"/>
+                          <a:cs typeface="Meiryo"/>
+                          <a:ea typeface="Meiryo"/>
+                        </a:rPr>
+                        <a:t>coupon_redemptions</a:t>
+                      </a:r>
+                    </a:p>
+                  </a:txBody>
+                  <a:tcPr marL="64008" marR="64008" marT="27432" marB="27432" anchor="ctr">
+                    <a:solidFill>
+                      <a:srgbClr val="F8FAFC"/>
+                    </a:solidFill>
+                  </a:tcPr>
+                </a:tc>
+                <a:tc>
+                  <a:txBody>
+                    <a:bodyPr wrap="square"/>
+                    <a:lstStyle/>
+                    <a:p>
+                      <a:pPr algn="l">
+                        <a:lnSpc>
+                          <a:spcPct val="115000"/>
+                        </a:lnSpc>
+                        <a:buNone/>
+                      </a:pPr>
+                      <a:r>
+                        <a:rPr sz="1000" b="0">
+                          <a:solidFill>
+                            <a:srgbClr val="14223A"/>
+                          </a:solidFill>
+                          <a:latin typeface="Meiryo"/>
+                          <a:cs typeface="Meiryo"/>
+                          <a:ea typeface="Meiryo"/>
+                        </a:rPr>
+                        <a:t>日報1件への割引クーポン適用記録</a:t>
+                      </a:r>
+                    </a:p>
+                  </a:txBody>
+                  <a:tcPr marL="64008" marR="64008" marT="27432" marB="27432" anchor="ctr">
+                    <a:solidFill>
+                      <a:srgbClr val="F8FAFC"/>
+                    </a:solidFill>
+                  </a:tcPr>
+                </a:tc>
+                <a:tc>
+                  <a:txBody>
+                    <a:bodyPr wrap="square"/>
+                    <a:lstStyle/>
+                    <a:p>
+                      <a:pPr algn="l">
+                        <a:lnSpc>
+                          <a:spcPct val="115000"/>
+                        </a:lnSpc>
+                        <a:buNone/>
+                      </a:pPr>
+                      <a:r>
+                        <a:rPr sz="1000" b="0">
+                          <a:solidFill>
+                            <a:srgbClr val="14223A"/>
+                          </a:solidFill>
+                          <a:latin typeface="Meiryo"/>
+                          <a:cs typeface="Meiryo"/>
+                          <a:ea typeface="Meiryo"/>
+                        </a:rPr>
+                        <a:t>UNIQUE(tenant_id, daily_report_id, coupon_id)</a:t>
+                      </a:r>
+                    </a:p>
+                  </a:txBody>
+                  <a:tcPr marL="64008" marR="64008" marT="27432" marB="27432" anchor="ctr">
+                    <a:solidFill>
+                      <a:srgbClr val="F8FAFC"/>
+                    </a:solidFill>
+                  </a:tcPr>
+                </a:tc>
+                <a:tc>
+                  <a:txBody>
+                    <a:bodyPr wrap="square"/>
+                    <a:lstStyle/>
+                    <a:p>
+                      <a:pPr algn="ctr">
+                        <a:lnSpc>
+                          <a:spcPct val="115000"/>
+                        </a:lnSpc>
+                        <a:buNone/>
+                      </a:pPr>
+                      <a:r>
+                        <a:rPr sz="1000" b="0">
+                          <a:solidFill>
+                            <a:srgbClr val="14223A"/>
+                          </a:solidFill>
+                          <a:latin typeface="Meiryo"/>
+                          <a:cs typeface="Meiryo"/>
+                          <a:ea typeface="Meiryo"/>
+                        </a:rPr>
+                        <a:t>○</a:t>
+                      </a:r>
+                    </a:p>
+                  </a:txBody>
+                  <a:tcPr marL="64008" marR="64008" marT="27432" marB="27432" anchor="ctr">
+                    <a:solidFill>
+                      <a:srgbClr val="F8FAFC"/>
+                    </a:solidFill>
+                  </a:tcPr>
+                </a:tc>
+              </a:tr>
             </a:tbl>
           </a:graphicData>
         </a:graphic>
@@ -49679,7 +50020,7 @@
                 <a:cs typeface="Meiryo"/>
                 <a:ea typeface="Meiryo"/>
               </a:rPr>
-              <a:t>この15枚が「土台」です</a:t>
+              <a:t>この16枚が「土台」です</a:t>
             </a:r>
           </a:p>
         </p:txBody>

--- a/doc/12_データベース構造レビュー資料.pptx
+++ b/doc/12_データベース構造レビュー資料.pptx
@@ -3933,7 +3933,7 @@
                           <a:cs typeface="Meiryo"/>
                           <a:ea typeface="Meiryo"/>
                         </a:rPr>
-                        <a:t>上の子。写真は実体を持たず保存キーのみ。10MB・10枚をCHECKで制限</a:t>
+                        <a:t>上の子。写真は実体を持たず保存キーのみ。1枚10MBまでをCHECKで制限</a:t>
                       </a:r>
                     </a:p>
                   </a:txBody>
@@ -10025,7 +10025,18 @@
                 <a:cs typeface="Meiryo"/>
                 <a:ea typeface="Meiryo"/>
               </a:rPr>
-              <a:t>この形を適用した参照(全7本)</a:t>
+              <a:t>この形を適用した参照(全50本)</a:t>
+            </a:r>
+            <a:r>
+              <a:rPr sz="1050" b="0" i="0">
+                <a:solidFill>
+                  <a:srgbClr val="64748B"/>
+                </a:solidFill>
+                <a:latin typeface="Meiryo"/>
+                <a:cs typeface="Meiryo"/>
+                <a:ea typeface="Meiryo"/>
+              </a:rPr>
+              <a:t>   下は稼働中の16枚にあるもの</a:t>
             </a:r>
           </a:p>
         </p:txBody>
@@ -10089,7 +10100,7 @@
                 <a:cs typeface="Meiryo"/>
                 <a:ea typeface="Meiryo"/>
               </a:rPr>
-              <a:t>daily_reports → staff / customers</a:t>
+              <a:t>daily_reports → staff / customers / reservations</a:t>
             </a:r>
           </a:p>
         </p:txBody>
@@ -10422,8 +10433,8 @@
         </p:nvSpPr>
         <p:spPr>
           <a:xfrm>
-            <a:off x="457200" y="5532120"/>
-            <a:ext cx="11277295" cy="813307"/>
+            <a:off x="457200" y="5407533"/>
+            <a:ext cx="11277295" cy="974979"/>
           </a:xfrm>
           <a:prstGeom prst="roundRect">
             <a:avLst>
@@ -10468,8 +10479,8 @@
         </p:nvSpPr>
         <p:spPr>
           <a:xfrm>
-            <a:off x="457200" y="5532120"/>
-            <a:ext cx="68580" cy="813307"/>
+            <a:off x="457200" y="5407533"/>
+            <a:ext cx="68580" cy="974979"/>
           </a:xfrm>
           <a:prstGeom prst="rect">
             <a:avLst/>
@@ -10512,7 +10523,7 @@
         </p:nvSpPr>
         <p:spPr>
           <a:xfrm>
-            <a:off x="640080" y="5623559"/>
+            <a:off x="640080" y="5498973"/>
             <a:ext cx="10911535" cy="237744"/>
           </a:xfrm>
           <a:prstGeom prst="rect">
@@ -10554,8 +10565,8 @@
         </p:nvSpPr>
         <p:spPr>
           <a:xfrm>
-            <a:off x="640080" y="5879592"/>
-            <a:ext cx="10929823" cy="392683"/>
+            <a:off x="640080" y="5755005"/>
+            <a:ext cx="10929823" cy="554355"/>
           </a:xfrm>
           <a:prstGeom prst="rect">
             <a:avLst/>
@@ -10575,7 +10586,7 @@
               <a:buNone/>
             </a:pPr>
             <a:r>
-              <a:rPr sz="1100" b="0" i="0">
+              <a:rPr sz="1050" b="0" i="0">
                 <a:solidFill>
                   <a:srgbClr val="14223A"/>
                 </a:solidFill>
@@ -10583,7 +10594,7 @@
                 <a:cs typeface="Meiryo"/>
                 <a:ea typeface="Meiryo"/>
               </a:rPr>
-              <a:t>この落とし穴は過去のレビューでご指摘いただいて塞いだものです。参照先には UNIQUE(tenant_id, id) を張ってあります。ON DELETE は全て no action(親を消せない)にしており、廃棄はテナント単位の物理削除で行う方針です。</a:t>
+              <a:t>クーポンの3枚(customer_coupons / coupon_redemptions)も同じ形で customers・coupons・daily_reports を指しています。先行整備の18枚も同じ規約に載せてあり、複合外部キーは全部で50本です。参照先には UNIQUE(tenant_id, id) を張ってあります。ON DELETE は全て no action(親を消せない)にしており、廃棄はテナント単位の物理削除で行う方針です。</a:t>
             </a:r>
           </a:p>
         </p:txBody>
@@ -24155,8 +24166,8 @@
         </p:nvSpPr>
         <p:spPr>
           <a:xfrm>
-            <a:off x="457200" y="5742432"/>
-            <a:ext cx="11277295" cy="626110"/>
+            <a:off x="457200" y="5569204"/>
+            <a:ext cx="11277295" cy="813307"/>
           </a:xfrm>
           <a:prstGeom prst="roundRect">
             <a:avLst>
@@ -24201,8 +24212,8 @@
         </p:nvSpPr>
         <p:spPr>
           <a:xfrm>
-            <a:off x="457200" y="5742432"/>
-            <a:ext cx="68580" cy="626110"/>
+            <a:off x="457200" y="5569204"/>
+            <a:ext cx="68580" cy="813307"/>
           </a:xfrm>
           <a:prstGeom prst="rect">
             <a:avLst/>
@@ -24245,7 +24256,7 @@
         </p:nvSpPr>
         <p:spPr>
           <a:xfrm>
-            <a:off x="640080" y="5833872"/>
+            <a:off x="640080" y="5660644"/>
             <a:ext cx="10911535" cy="237744"/>
           </a:xfrm>
           <a:prstGeom prst="rect">
@@ -24287,8 +24298,8 @@
         </p:nvSpPr>
         <p:spPr>
           <a:xfrm>
-            <a:off x="640080" y="6089904"/>
-            <a:ext cx="10929823" cy="205486"/>
+            <a:off x="640080" y="5916676"/>
+            <a:ext cx="10929823" cy="392683"/>
           </a:xfrm>
           <a:prstGeom prst="rect">
             <a:avLst/>
@@ -24316,7 +24327,7 @@
                 <a:cs typeface="Meiryo"/>
                 <a:ea typeface="Meiryo"/>
               </a:rPr>
-              <a:t>「この用語の使い方が違う」という指摘も歓迎です。詳細な定義・全列一覧は doc/09_データベース構造解説.md に記載しています。</a:t>
+              <a:t>「この用語の使い方が違う」という指摘も歓迎です。設計の詳細は doc/09_データベース構造解説.md、ER図と全列一覧は doc/16_データベース構造リファレンス.md(スキーマから自動生成)にあります。</a:t>
             </a:r>
           </a:p>
         </p:txBody>
@@ -37951,7 +37962,7 @@
               <a:buChar char="▪"/>
             </a:pPr>
             <a:r>
-              <a:rPr sz="1050" b="1">
+              <a:rPr sz="1000" b="1">
                 <a:solidFill>
                   <a:srgbClr val="14223A"/>
                 </a:solidFill>
@@ -37962,7 +37973,7 @@
               <a:t>doc/09_データベース構造解説.md</a:t>
             </a:r>
             <a:r>
-              <a:rPr sz="1050" b="0">
+              <a:rPr sz="1000" b="0">
                 <a:solidFill>
                   <a:srgbClr val="14223A"/>
                 </a:solidFill>
@@ -37970,7 +37981,7 @@
                 <a:cs typeface="Meiryo"/>
                 <a:ea typeface="Meiryo"/>
               </a:rPr>
-              <a:t>  本資料の詳細版。ER図・全列一覧・レビュー観点</a:t>
+              <a:t>  本資料の詳細版。設計方針・暗号化の構成・レビュー観点</a:t>
             </a:r>
           </a:p>
           <a:p>
@@ -37988,7 +37999,7 @@
               <a:buChar char="▪"/>
             </a:pPr>
             <a:r>
-              <a:rPr sz="1050" b="1">
+              <a:rPr sz="1000" b="1">
                 <a:solidFill>
                   <a:srgbClr val="14223A"/>
                 </a:solidFill>
@@ -37996,10 +38007,10 @@
                 <a:cs typeface="Meiryo"/>
                 <a:ea typeface="Meiryo"/>
               </a:rPr>
-              <a:t>doc/15_追加ドメインの設計とレビュー論点.md</a:t>
-            </a:r>
-            <a:r>
-              <a:rPr sz="1050" b="0">
+              <a:t>doc/16_データベース構造リファレンス.md</a:t>
+            </a:r>
+            <a:r>
+              <a:rPr sz="1000" b="0">
                 <a:solidFill>
                   <a:srgbClr val="14223A"/>
                 </a:solidFill>
@@ -38007,7 +38018,7 @@
                 <a:cs typeface="Meiryo"/>
                 <a:ea typeface="Meiryo"/>
               </a:rPr>
-              <a:t>  第4章の18テーブルの設計理由と、未決の論点</a:t>
+              <a:t>  ER図と全34テーブルの全列一覧。スキーマから自動生成(pnpm db:docs)</a:t>
             </a:r>
           </a:p>
           <a:p>
@@ -38025,7 +38036,7 @@
               <a:buChar char="▪"/>
             </a:pPr>
             <a:r>
-              <a:rPr sz="1050" b="1">
+              <a:rPr sz="1000" b="1">
                 <a:solidFill>
                   <a:srgbClr val="14223A"/>
                 </a:solidFill>
@@ -38033,10 +38044,10 @@
                 <a:cs typeface="Meiryo"/>
                 <a:ea typeface="Meiryo"/>
               </a:rPr>
-              <a:t>doc/14_データベース設計の指針と落とし穴.md</a:t>
-            </a:r>
-            <a:r>
-              <a:rPr sz="1050" b="0">
+              <a:t>doc/15_追加ドメインの設計とレビュー論点.md</a:t>
+            </a:r>
+            <a:r>
+              <a:rPr sz="1000" b="0">
                 <a:solidFill>
                   <a:srgbClr val="14223A"/>
                 </a:solidFill>
@@ -38044,7 +38055,7 @@
                 <a:cs typeface="Meiryo"/>
                 <a:ea typeface="Meiryo"/>
               </a:rPr>
-              <a:t>  DBを触るときの決めごとと、実際に踏んだ落とし穴</a:t>
+              <a:t>  第4章の18テーブルの設計理由と、未決の論点</a:t>
             </a:r>
           </a:p>
           <a:p>
@@ -38062,7 +38073,7 @@
               <a:buChar char="▪"/>
             </a:pPr>
             <a:r>
-              <a:rPr sz="1050" b="1">
+              <a:rPr sz="1000" b="1">
                 <a:solidFill>
                   <a:srgbClr val="14223A"/>
                 </a:solidFill>
@@ -38070,10 +38081,47 @@
                 <a:cs typeface="Meiryo"/>
                 <a:ea typeface="Meiryo"/>
               </a:rPr>
+              <a:t>doc/14_データベース設計の指針と落とし穴.md</a:t>
+            </a:r>
+            <a:r>
+              <a:rPr sz="1000" b="0">
+                <a:solidFill>
+                  <a:srgbClr val="14223A"/>
+                </a:solidFill>
+                <a:latin typeface="Meiryo"/>
+                <a:cs typeface="Meiryo"/>
+                <a:ea typeface="Meiryo"/>
+              </a:rPr>
+              <a:t>  DBを触るときの決めごとと、実際に踏んだ落とし穴</a:t>
+            </a:r>
+          </a:p>
+          <a:p>
+            <a:pPr marL="182880" indent="-182880">
+              <a:lnSpc>
+                <a:spcPct val="132000"/>
+              </a:lnSpc>
+              <a:spcBef>
+                <a:spcPts val="400"/>
+              </a:spcBef>
+              <a:buClr>
+                <a:srgbClr val="0369A1"/>
+              </a:buClr>
+              <a:buFont typeface="Meiryo"/>
+              <a:buChar char="▪"/>
+            </a:pPr>
+            <a:r>
+              <a:rPr sz="1000" b="1">
+                <a:solidFill>
+                  <a:srgbClr val="14223A"/>
+                </a:solidFill>
+                <a:latin typeface="Meiryo"/>
+                <a:cs typeface="Meiryo"/>
+                <a:ea typeface="Meiryo"/>
+              </a:rPr>
               <a:t>doc/13_アーキテクチャ説明資料.pptx</a:t>
             </a:r>
             <a:r>
-              <a:rPr sz="1050" b="0">
+              <a:rPr sz="1000" b="0">
                 <a:solidFill>
                   <a:srgbClr val="14223A"/>
                 </a:solidFill>
@@ -39499,7 +39547,7 @@
                 <a:cs typeface="Meiryo"/>
                 <a:ea typeface="Meiryo"/>
               </a:rPr>
-              <a:t>  … Excelの1シートに相当。このシステムには33枚ある</a:t>
+              <a:t>  … Excelの1シートに相当。このシステムには34枚ある</a:t>
             </a:r>
           </a:p>
           <a:p>
@@ -45305,7 +45353,7 @@
                 <a:cs typeface="Meiryo"/>
                 <a:ea typeface="Meiryo"/>
               </a:rPr>
-              <a:t>packages/db/src/schema/*.ts / 詳細なER図は doc/09 第2章</a:t>
+              <a:t>packages/db/src/schema/*.ts / ドメイン別のER図は doc/16 第1章(自動生成)</a:t>
             </a:r>
           </a:p>
         </p:txBody>
@@ -45595,7 +45643,7 @@
                 <a:cs typeface="Meiryo"/>
                 <a:ea typeface="Meiryo"/>
               </a:rPr>
-              <a:t>関係の矢印は doc/09 のER図</a:t>
+              <a:t>関係の矢印は doc/16 のER図</a:t>
             </a:r>
           </a:p>
         </p:txBody>
@@ -48088,7 +48136,7 @@
                           <a:cs typeface="Meiryo"/>
                           <a:ea typeface="Meiryo"/>
                         </a:rPr>
-                        <a:t>1テナント1行。資格情報3列だけ暗号化</a:t>
+                        <a:t>1テナント1行。資格情報3列だけ暗号化 + 領収書の締め日</a:t>
                       </a:r>
                     </a:p>
                   </a:txBody>
@@ -49156,7 +49204,7 @@
                           <a:cs typeface="Meiryo"/>
                           <a:ea typeface="Meiryo"/>
                         </a:rPr>
-                        <a:t>領収書。画像はオブジェクトストレージ</a:t>
+                        <a:t>領収書。取消は行を消さず cancelled_at</a:t>
                       </a:r>
                     </a:p>
                   </a:txBody>
@@ -49186,7 +49234,7 @@
                           <a:cs typeface="Meiryo"/>
                           <a:ea typeface="Meiryo"/>
                         </a:rPr>
-                        <a:t>金額は整数の円。billing_type で顧客請求/会社経費</a:t>
+                        <a:t>金額は整数の円。cancellable_until を登録時に固定</a:t>
                       </a:r>
                     </a:p>
                   </a:txBody>
